--- a/docs/defence/Monarch_Defence.pptx
+++ b/docs/defence/Monarch_Defence.pptx
@@ -33,6 +33,7 @@
     <p:sldId id="281" r:id="rId32"/>
     <p:sldId id="282" r:id="rId33"/>
     <p:sldId id="283" r:id="rId34"/>
+    <p:sldId id="284" r:id="rId35"/>
   </p:sldIdLst>
   <p:sldSz cx="12191695" cy="6858000" type="screen4x3"/>
   <p:notesSz cx="6858000" cy="9144000"/>
@@ -4740,7 +4741,7 @@
                 </a:solidFill>
                 <a:latin typeface="Calibri"/>
               </a:rPr>
-              <a:t>against a design powered to detect 0.0268; AUC against the pre-scan label is 0.6274</a:t>
+              <a:t>against a design powered to detect 0.0268</a:t>
             </a:r>
           </a:p>
         </p:txBody>
@@ -5043,7 +5044,7 @@
                 </a:solidFill>
                 <a:latin typeface="Calibri"/>
               </a:rPr>
-              <a:t>Fear-activating content carries the effect; outrage does not separate</a:t>
+              <a:t>Fear-activating content carries the effect; outrage moves both networks equally</a:t>
             </a:r>
           </a:p>
         </p:txBody>
@@ -5511,13 +5512,13 @@
               </a:spcAft>
             </a:pPr>
             <a:r>
-              <a:rPr sz="2000" b="1" i="0">
+              <a:rPr sz="1900" b="1" i="0">
                 <a:solidFill>
                   <a:srgbClr val="C0392B"/>
                 </a:solidFill>
                 <a:latin typeface="Calibri"/>
               </a:rPr>
-              <a:t>Outrage is the category the proposal expected to separate most, and it does not separate at all.</a:t>
+              <a:t>Outrage is the category the proposal expected to separate most. Taken apart, it raises both networks: affective d = +0.507, deliberative d = +0.491. Fear raises one only.</a:t>
             </a:r>
           </a:p>
         </p:txBody>
@@ -6560,7 +6561,7 @@
       <p:grpSpPr/>
       <p:pic>
         <p:nvPicPr>
-          <p:cNvPr id="2" name="Picture 1" descr="arrows-clockwise.png"/>
+          <p:cNvPr id="2" name="Picture 1" descr="warning.png"/>
           <p:cNvPicPr>
             <a:picLocks noChangeAspect="1"/>
           </p:cNvPicPr>
@@ -6616,7 +6617,7 @@
                 </a:solidFill>
                 <a:latin typeface="Calibri"/>
               </a:rPr>
-              <a:t>Group-level claims hold at this precision; per-item claims do not</a:t>
+              <a:t>A bag of words beats the index on the label, so the index is not a classifier</a:t>
             </a:r>
           </a:p>
         </p:txBody>
@@ -6651,11 +6652,11 @@
             <a:r>
               <a:rPr sz="5400" b="1" i="0">
                 <a:solidFill>
-                  <a:srgbClr val="1F4E79"/>
-                </a:solidFill>
-                <a:latin typeface="Calibri"/>
-              </a:rPr>
-              <a:t>0.8725</a:t>
+                  <a:srgbClr val="595959"/>
+                </a:solidFill>
+                <a:latin typeface="Calibri"/>
+              </a:rPr>
+              <a:t>0.6274</a:t>
             </a:r>
           </a:p>
         </p:txBody>
@@ -6694,7 +6695,7 @@
                 </a:solidFill>
                 <a:latin typeface="Calibri"/>
               </a:rPr>
-              <a:t>ICC between two GPU sessions</a:t>
+              <a:t>AUC, the index, nothing fitted</a:t>
             </a:r>
           </a:p>
         </p:txBody>
@@ -6702,45 +6703,6 @@
       <p:sp>
         <p:nvSpPr>
           <p:cNvPr id="6" name="TextBox 5"/>
-          <p:cNvSpPr txBox="1"/>
-          <p:nvPr/>
-        </p:nvSpPr>
-        <p:spPr>
-          <a:xfrm>
-            <a:off x="685800" y="3154680"/>
-            <a:ext cx="5120640" cy="1371600"/>
-          </a:xfrm>
-          <a:prstGeom prst="rect">
-            <a:avLst/>
-          </a:prstGeom>
-          <a:noFill/>
-        </p:spPr>
-        <p:txBody>
-          <a:bodyPr wrap="square" anchor="t">
-            <a:spAutoFit/>
-          </a:bodyPr>
-          <a:lstStyle/>
-          <a:p>
-            <a:pPr algn="l">
-              <a:spcAft>
-                <a:spcPts val="0"/>
-              </a:spcAft>
-            </a:pPr>
-            <a:r>
-              <a:rPr sz="1700" b="0" i="0">
-                <a:solidFill>
-                  <a:srgbClr val="1A1A1A"/>
-                </a:solidFill>
-                <a:latin typeface="Calibri"/>
-              </a:rPr>
-              <a:t>The separation replicates: 0.0888 on the second session against 0.1068 on the first. Both clear the detectable floor.</a:t>
-            </a:r>
-          </a:p>
-        </p:txBody>
-      </p:sp>
-      <p:sp>
-        <p:nvSpPr>
-          <p:cNvPr id="7" name="TextBox 6"/>
           <p:cNvSpPr txBox="1"/>
           <p:nvPr/>
         </p:nvSpPr>
@@ -6772,14 +6734,14 @@
                 </a:solidFill>
                 <a:latin typeface="Calibri"/>
               </a:rPr>
-              <a:t>12.8%</a:t>
-            </a:r>
-          </a:p>
-        </p:txBody>
-      </p:sp>
-      <p:sp>
-        <p:nvSpPr>
-          <p:cNvPr id="8" name="TextBox 7"/>
+              <a:t>0.9758</a:t>
+            </a:r>
+          </a:p>
+        </p:txBody>
+      </p:sp>
+      <p:sp>
+        <p:nvSpPr>
+          <p:cNvPr id="7" name="TextBox 6"/>
           <p:cNvSpPr txBox="1"/>
           <p:nvPr/>
         </p:nvSpPr>
@@ -6811,7 +6773,46 @@
                 </a:solidFill>
                 <a:latin typeface="Calibri"/>
               </a:rPr>
-              <a:t>of items reverse direction</a:t>
+              <a:t>AUC, TF-IDF + logistic, 5-fold</a:t>
+            </a:r>
+          </a:p>
+        </p:txBody>
+      </p:sp>
+      <p:sp>
+        <p:nvSpPr>
+          <p:cNvPr id="8" name="TextBox 7"/>
+          <p:cNvSpPr txBox="1"/>
+          <p:nvPr/>
+        </p:nvSpPr>
+        <p:spPr>
+          <a:xfrm>
+            <a:off x="685800" y="3246120"/>
+            <a:ext cx="10820095" cy="1463040"/>
+          </a:xfrm>
+          <a:prstGeom prst="rect">
+            <a:avLst/>
+          </a:prstGeom>
+          <a:noFill/>
+        </p:spPr>
+        <p:txBody>
+          <a:bodyPr wrap="square" anchor="t">
+            <a:spAutoFit/>
+          </a:bodyPr>
+          <a:lstStyle/>
+          <a:p>
+            <a:pPr algn="l">
+              <a:spcAft>
+                <a:spcPts val="0"/>
+              </a:spcAft>
+            </a:pPr>
+            <a:r>
+              <a:rPr sz="1700" b="0" i="0">
+                <a:solidFill>
+                  <a:srgbClr val="1A1A1A"/>
+                </a:solidFill>
+                <a:latin typeface="Calibri"/>
+              </a:rPr>
+              <a:t>Same 400 rows, same pre-scan label. Sentiment (VADER) does not clear chance, 0.5392. On the 150 ISOT items, the one source carrying both classes, TF-IDF still reaches 0.9724. A probe on the same words recovers the source dataset at 66.25% against 25% chance, so much of the lexical win is provenance.</a:t>
             </a:r>
           </a:p>
         </p:txBody>
@@ -6824,8 +6825,8 @@
         </p:nvSpPr>
         <p:spPr>
           <a:xfrm>
-            <a:off x="6492240" y="3154680"/>
-            <a:ext cx="5029200" cy="1371600"/>
+            <a:off x="685800" y="4846320"/>
+            <a:ext cx="10820095" cy="731520"/>
           </a:xfrm>
           <a:prstGeom prst="rect">
             <a:avLst/>
@@ -6844,13 +6845,13 @@
               </a:spcAft>
             </a:pPr>
             <a:r>
-              <a:rPr sz="1700" b="0" i="0">
-                <a:solidFill>
-                  <a:srgbClr val="1A1A1A"/>
-                </a:solidFill>
-                <a:latin typeface="Calibri"/>
-              </a:rPr>
-              <a:t>51 of 400 items flip sign between sessions, so no verdict on one article appears anywhere in the analysis, the figures or the public site.</a:t>
+              <a:rPr sz="1900" b="1" i="0">
+                <a:solidFill>
+                  <a:srgbClr val="C0392B"/>
+                </a:solidFill>
+                <a:latin typeface="Calibri"/>
+              </a:rPr>
+              <a:t>The index is carried forward as the field observable the physics needs, not as a detector.</a:t>
             </a:r>
           </a:p>
         </p:txBody>
@@ -6858,45 +6859,6 @@
       <p:sp>
         <p:nvSpPr>
           <p:cNvPr id="10" name="TextBox 9"/>
-          <p:cNvSpPr txBox="1"/>
-          <p:nvPr/>
-        </p:nvSpPr>
-        <p:spPr>
-          <a:xfrm>
-            <a:off x="685800" y="4892040"/>
-            <a:ext cx="10820095" cy="822960"/>
-          </a:xfrm>
-          <a:prstGeom prst="rect">
-            <a:avLst/>
-          </a:prstGeom>
-          <a:noFill/>
-        </p:spPr>
-        <p:txBody>
-          <a:bodyPr wrap="square" anchor="t">
-            <a:spAutoFit/>
-          </a:bodyPr>
-          <a:lstStyle/>
-          <a:p>
-            <a:pPr algn="l">
-              <a:spcAft>
-                <a:spcPts val="0"/>
-              </a:spcAft>
-            </a:pPr>
-            <a:r>
-              <a:rPr sz="1700" b="0" i="0">
-                <a:solidFill>
-                  <a:srgbClr val="595959"/>
-                </a:solidFill>
-                <a:latin typeface="Calibri"/>
-              </a:rPr>
-              <a:t>A second session scanned all 400 items with identical text, code and regions. Neither run is corrected toward the other, and they are not averaged.</a:t>
-            </a:r>
-          </a:p>
-        </p:txBody>
-      </p:sp>
-      <p:sp>
-        <p:nvSpPr>
-          <p:cNvPr id="11" name="TextBox 10"/>
           <p:cNvSpPr txBox="1"/>
           <p:nvPr/>
         </p:nvSpPr>
@@ -6935,7 +6897,7 @@
       </p:sp>
       <p:sp>
         <p:nvSpPr>
-          <p:cNvPr id="12" name="TextBox 11"/>
+          <p:cNvPr id="11" name="TextBox 10"/>
           <p:cNvSpPr txBox="1"/>
           <p:nvPr/>
         </p:nvSpPr>
@@ -6992,7 +6954,7 @@
       <p:grpSpPr/>
       <p:pic>
         <p:nvPicPr>
-          <p:cNvPr id="2" name="Picture 1" descr="brain.png"/>
+          <p:cNvPr id="2" name="Picture 1" descr="arrows-clockwise.png"/>
           <p:cNvPicPr>
             <a:picLocks noChangeAspect="1"/>
           </p:cNvPicPr>
@@ -7048,38 +7010,248 @@
                 </a:solidFill>
                 <a:latin typeface="Calibri"/>
               </a:rPr>
-              <a:t>The encoder returns a full cortical map, not a summary statistic</a:t>
-            </a:r>
-          </a:p>
-        </p:txBody>
-      </p:sp>
-      <p:pic>
-        <p:nvPicPr>
-          <p:cNvPr id="4" name="Picture 3" descr="B3_per_vertex_fear_activating-0000.png"/>
-          <p:cNvPicPr>
-            <a:picLocks noChangeAspect="1"/>
-          </p:cNvPicPr>
-          <p:nvPr/>
-        </p:nvPicPr>
-        <p:blipFill>
-          <a:blip r:embed="rId3"/>
-          <a:stretch>
-            <a:fillRect/>
-          </a:stretch>
-        </p:blipFill>
-        <p:spPr>
-          <a:xfrm>
-            <a:off x="2148840" y="1325880"/>
-            <a:ext cx="7863840" cy="3538728"/>
-          </a:xfrm>
-          <a:prstGeom prst="rect">
-            <a:avLst/>
-          </a:prstGeom>
-        </p:spPr>
-      </p:pic>
+              <a:t>Group-level claims hold at this precision; per-item claims do not</a:t>
+            </a:r>
+          </a:p>
+        </p:txBody>
+      </p:sp>
+      <p:sp>
+        <p:nvSpPr>
+          <p:cNvPr id="4" name="TextBox 3"/>
+          <p:cNvSpPr txBox="1"/>
+          <p:nvPr/>
+        </p:nvSpPr>
+        <p:spPr>
+          <a:xfrm>
+            <a:off x="685800" y="1554480"/>
+            <a:ext cx="5120640" cy="1005840"/>
+          </a:xfrm>
+          <a:prstGeom prst="rect">
+            <a:avLst/>
+          </a:prstGeom>
+          <a:noFill/>
+        </p:spPr>
+        <p:txBody>
+          <a:bodyPr wrap="square" anchor="t">
+            <a:spAutoFit/>
+          </a:bodyPr>
+          <a:lstStyle/>
+          <a:p>
+            <a:pPr algn="ctr">
+              <a:spcAft>
+                <a:spcPts val="0"/>
+              </a:spcAft>
+            </a:pPr>
+            <a:r>
+              <a:rPr sz="5400" b="1" i="0">
+                <a:solidFill>
+                  <a:srgbClr val="1F4E79"/>
+                </a:solidFill>
+                <a:latin typeface="Calibri"/>
+              </a:rPr>
+              <a:t>0.8725</a:t>
+            </a:r>
+          </a:p>
+        </p:txBody>
+      </p:sp>
       <p:sp>
         <p:nvSpPr>
           <p:cNvPr id="5" name="TextBox 4"/>
+          <p:cNvSpPr txBox="1"/>
+          <p:nvPr/>
+        </p:nvSpPr>
+        <p:spPr>
+          <a:xfrm>
+            <a:off x="685800" y="2606040"/>
+            <a:ext cx="5120640" cy="411480"/>
+          </a:xfrm>
+          <a:prstGeom prst="rect">
+            <a:avLst/>
+          </a:prstGeom>
+          <a:noFill/>
+        </p:spPr>
+        <p:txBody>
+          <a:bodyPr wrap="square" anchor="t">
+            <a:spAutoFit/>
+          </a:bodyPr>
+          <a:lstStyle/>
+          <a:p>
+            <a:pPr algn="ctr">
+              <a:spcAft>
+                <a:spcPts val="0"/>
+              </a:spcAft>
+            </a:pPr>
+            <a:r>
+              <a:rPr sz="1600" b="0" i="0">
+                <a:solidFill>
+                  <a:srgbClr val="595959"/>
+                </a:solidFill>
+                <a:latin typeface="Calibri"/>
+              </a:rPr>
+              <a:t>ICC between two GPU sessions</a:t>
+            </a:r>
+          </a:p>
+        </p:txBody>
+      </p:sp>
+      <p:sp>
+        <p:nvSpPr>
+          <p:cNvPr id="6" name="TextBox 5"/>
+          <p:cNvSpPr txBox="1"/>
+          <p:nvPr/>
+        </p:nvSpPr>
+        <p:spPr>
+          <a:xfrm>
+            <a:off x="685800" y="3154680"/>
+            <a:ext cx="5120640" cy="1371600"/>
+          </a:xfrm>
+          <a:prstGeom prst="rect">
+            <a:avLst/>
+          </a:prstGeom>
+          <a:noFill/>
+        </p:spPr>
+        <p:txBody>
+          <a:bodyPr wrap="square" anchor="t">
+            <a:spAutoFit/>
+          </a:bodyPr>
+          <a:lstStyle/>
+          <a:p>
+            <a:pPr algn="l">
+              <a:spcAft>
+                <a:spcPts val="0"/>
+              </a:spcAft>
+            </a:pPr>
+            <a:r>
+              <a:rPr sz="1700" b="0" i="0">
+                <a:solidFill>
+                  <a:srgbClr val="1A1A1A"/>
+                </a:solidFill>
+                <a:latin typeface="Calibri"/>
+              </a:rPr>
+              <a:t>The separation replicates: 0.0888 on the second session against 0.1068 on the first. Both clear the detectable floor.</a:t>
+            </a:r>
+          </a:p>
+        </p:txBody>
+      </p:sp>
+      <p:sp>
+        <p:nvSpPr>
+          <p:cNvPr id="7" name="TextBox 6"/>
+          <p:cNvSpPr txBox="1"/>
+          <p:nvPr/>
+        </p:nvSpPr>
+        <p:spPr>
+          <a:xfrm>
+            <a:off x="6492240" y="1554480"/>
+            <a:ext cx="5029200" cy="1005840"/>
+          </a:xfrm>
+          <a:prstGeom prst="rect">
+            <a:avLst/>
+          </a:prstGeom>
+          <a:noFill/>
+        </p:spPr>
+        <p:txBody>
+          <a:bodyPr wrap="square" anchor="t">
+            <a:spAutoFit/>
+          </a:bodyPr>
+          <a:lstStyle/>
+          <a:p>
+            <a:pPr algn="ctr">
+              <a:spcAft>
+                <a:spcPts val="0"/>
+              </a:spcAft>
+            </a:pPr>
+            <a:r>
+              <a:rPr sz="5400" b="1" i="0">
+                <a:solidFill>
+                  <a:srgbClr val="C0392B"/>
+                </a:solidFill>
+                <a:latin typeface="Calibri"/>
+              </a:rPr>
+              <a:t>12.8%</a:t>
+            </a:r>
+          </a:p>
+        </p:txBody>
+      </p:sp>
+      <p:sp>
+        <p:nvSpPr>
+          <p:cNvPr id="8" name="TextBox 7"/>
+          <p:cNvSpPr txBox="1"/>
+          <p:nvPr/>
+        </p:nvSpPr>
+        <p:spPr>
+          <a:xfrm>
+            <a:off x="6492240" y="2606040"/>
+            <a:ext cx="5029200" cy="411480"/>
+          </a:xfrm>
+          <a:prstGeom prst="rect">
+            <a:avLst/>
+          </a:prstGeom>
+          <a:noFill/>
+        </p:spPr>
+        <p:txBody>
+          <a:bodyPr wrap="square" anchor="t">
+            <a:spAutoFit/>
+          </a:bodyPr>
+          <a:lstStyle/>
+          <a:p>
+            <a:pPr algn="ctr">
+              <a:spcAft>
+                <a:spcPts val="0"/>
+              </a:spcAft>
+            </a:pPr>
+            <a:r>
+              <a:rPr sz="1600" b="0" i="0">
+                <a:solidFill>
+                  <a:srgbClr val="595959"/>
+                </a:solidFill>
+                <a:latin typeface="Calibri"/>
+              </a:rPr>
+              <a:t>of items reverse direction</a:t>
+            </a:r>
+          </a:p>
+        </p:txBody>
+      </p:sp>
+      <p:sp>
+        <p:nvSpPr>
+          <p:cNvPr id="9" name="TextBox 8"/>
+          <p:cNvSpPr txBox="1"/>
+          <p:nvPr/>
+        </p:nvSpPr>
+        <p:spPr>
+          <a:xfrm>
+            <a:off x="6492240" y="3154680"/>
+            <a:ext cx="5029200" cy="1371600"/>
+          </a:xfrm>
+          <a:prstGeom prst="rect">
+            <a:avLst/>
+          </a:prstGeom>
+          <a:noFill/>
+        </p:spPr>
+        <p:txBody>
+          <a:bodyPr wrap="square" anchor="t">
+            <a:spAutoFit/>
+          </a:bodyPr>
+          <a:lstStyle/>
+          <a:p>
+            <a:pPr algn="l">
+              <a:spcAft>
+                <a:spcPts val="0"/>
+              </a:spcAft>
+            </a:pPr>
+            <a:r>
+              <a:rPr sz="1700" b="0" i="0">
+                <a:solidFill>
+                  <a:srgbClr val="1A1A1A"/>
+                </a:solidFill>
+                <a:latin typeface="Calibri"/>
+              </a:rPr>
+              <a:t>51 of 400 items flip sign between sessions, so no verdict on one article appears anywhere in the analysis, the figures or the public site.</a:t>
+            </a:r>
+          </a:p>
+        </p:txBody>
+      </p:sp>
+      <p:sp>
+        <p:nvSpPr>
+          <p:cNvPr id="10" name="TextBox 9"/>
           <p:cNvSpPr txBox="1"/>
           <p:nvPr/>
         </p:nvSpPr>
@@ -7099,26 +7271,26 @@
           </a:bodyPr>
           <a:lstStyle/>
           <a:p>
-            <a:pPr algn="ctr">
-              <a:spcAft>
-                <a:spcPts val="0"/>
-              </a:spcAft>
-            </a:pPr>
-            <a:r>
-              <a:rPr sz="1600" b="0" i="0">
+            <a:pPr algn="l">
+              <a:spcAft>
+                <a:spcPts val="0"/>
+              </a:spcAft>
+            </a:pPr>
+            <a:r>
+              <a:rPr sz="1700" b="0" i="0">
                 <a:solidFill>
                   <a:srgbClr val="595959"/>
                 </a:solidFill>
                 <a:latin typeface="Calibri"/>
               </a:rPr>
-              <a:t>One fear-activating item at all 20,484 vertices, painted above the map's 70th percentile. Nothing is smoothed, interpolated or simulated.</a:t>
-            </a:r>
-          </a:p>
-        </p:txBody>
-      </p:sp>
-      <p:sp>
-        <p:nvSpPr>
-          <p:cNvPr id="6" name="TextBox 5"/>
+              <a:t>Additive noise at the measured session error predicts 55.3 reversals, 95% [44, 67]; 51 are observed. Reversing items sit near zero and spread evenly across categories.</a:t>
+            </a:r>
+          </a:p>
+        </p:txBody>
+      </p:sp>
+      <p:sp>
+        <p:nvSpPr>
+          <p:cNvPr id="11" name="TextBox 10"/>
           <p:cNvSpPr txBox="1"/>
           <p:nvPr/>
         </p:nvSpPr>
@@ -7157,7 +7329,7 @@
       </p:sp>
       <p:sp>
         <p:nvSpPr>
-          <p:cNvPr id="7" name="TextBox 6"/>
+          <p:cNvPr id="12" name="TextBox 11"/>
           <p:cNvSpPr txBox="1"/>
           <p:nvPr/>
         </p:nvSpPr>
@@ -7214,7 +7386,7 @@
       <p:grpSpPr/>
       <p:pic>
         <p:nvPicPr>
-          <p:cNvPr id="2" name="Picture 1" descr="atom.png"/>
+          <p:cNvPr id="2" name="Picture 1" descr="brain.png"/>
           <p:cNvPicPr>
             <a:picLocks noChangeAspect="1"/>
           </p:cNvPicPr>
@@ -7228,8 +7400,8 @@
         </p:blipFill>
         <p:spPr>
           <a:xfrm>
-            <a:off x="1188720" y="2148840"/>
-            <a:ext cx="658368" cy="658368"/>
+            <a:off x="685800" y="365759"/>
+            <a:ext cx="420624" cy="420624"/>
           </a:xfrm>
           <a:prstGeom prst="rect">
             <a:avLst/>
@@ -7244,8 +7416,8 @@
         </p:nvSpPr>
         <p:spPr>
           <a:xfrm>
-            <a:off x="1188720" y="2971800"/>
-            <a:ext cx="8229600" cy="1828800"/>
+            <a:off x="1289304" y="310896"/>
+            <a:ext cx="10216591" cy="822960"/>
           </a:xfrm>
           <a:prstGeom prst="rect">
             <a:avLst/>
@@ -7260,49 +7432,158 @@
           <a:p>
             <a:pPr algn="l">
               <a:spcAft>
-                <a:spcPts val="200"/>
-              </a:spcAft>
-            </a:pPr>
-            <a:r>
-              <a:rPr sz="4000" b="1" i="0">
-                <a:solidFill>
-                  <a:srgbClr val="2E75B6"/>
-                </a:solidFill>
-                <a:latin typeface="Calibri"/>
-              </a:rPr>
-              <a:t>04</a:t>
-            </a:r>
-          </a:p>
-          <a:p>
-            <a:pPr>
-              <a:spcAft>
-                <a:spcPts val="800"/>
-              </a:spcAft>
-            </a:pPr>
-            <a:r>
-              <a:rPr sz="3000" b="1" i="0">
+                <a:spcPts val="0"/>
+              </a:spcAft>
+            </a:pPr>
+            <a:r>
+              <a:rPr sz="2600" b="1" i="0">
                 <a:solidFill>
                   <a:srgbClr val="1F4E79"/>
                 </a:solidFill>
                 <a:latin typeface="Calibri"/>
               </a:rPr>
-              <a:t>The physics</a:t>
-            </a:r>
-          </a:p>
-          <a:p>
-            <a:pPr>
-              <a:spcAft>
-                <a:spcPts val="800"/>
-              </a:spcAft>
-            </a:pPr>
-            <a:r>
-              <a:rPr sz="1700" b="0" i="0">
+              <a:t>The encoder returns a full cortical map, not a summary statistic</a:t>
+            </a:r>
+          </a:p>
+        </p:txBody>
+      </p:sp>
+      <p:pic>
+        <p:nvPicPr>
+          <p:cNvPr id="4" name="Picture 3" descr="B3_per_vertex_fear_activating-0000.png"/>
+          <p:cNvPicPr>
+            <a:picLocks noChangeAspect="1"/>
+          </p:cNvPicPr>
+          <p:nvPr/>
+        </p:nvPicPr>
+        <p:blipFill>
+          <a:blip r:embed="rId3"/>
+          <a:stretch>
+            <a:fillRect/>
+          </a:stretch>
+        </p:blipFill>
+        <p:spPr>
+          <a:xfrm>
+            <a:off x="2148840" y="1325880"/>
+            <a:ext cx="7863840" cy="3538728"/>
+          </a:xfrm>
+          <a:prstGeom prst="rect">
+            <a:avLst/>
+          </a:prstGeom>
+        </p:spPr>
+      </p:pic>
+      <p:sp>
+        <p:nvSpPr>
+          <p:cNvPr id="5" name="TextBox 4"/>
+          <p:cNvSpPr txBox="1"/>
+          <p:nvPr/>
+        </p:nvSpPr>
+        <p:spPr>
+          <a:xfrm>
+            <a:off x="685800" y="4892040"/>
+            <a:ext cx="10820095" cy="822960"/>
+          </a:xfrm>
+          <a:prstGeom prst="rect">
+            <a:avLst/>
+          </a:prstGeom>
+          <a:noFill/>
+        </p:spPr>
+        <p:txBody>
+          <a:bodyPr wrap="square" anchor="t">
+            <a:spAutoFit/>
+          </a:bodyPr>
+          <a:lstStyle/>
+          <a:p>
+            <a:pPr algn="ctr">
+              <a:spcAft>
+                <a:spcPts val="0"/>
+              </a:spcAft>
+            </a:pPr>
+            <a:r>
+              <a:rPr sz="1600" b="0" i="0">
                 <a:solidFill>
                   <a:srgbClr val="595959"/>
                 </a:solidFill>
                 <a:latin typeface="Calibri"/>
               </a:rPr>
-              <a:t>What a measured field is worth.</a:t>
+              <a:t>One fear-activating item at all 20,484 vertices, painted above the map's 70th percentile. Nothing is smoothed, interpolated or simulated.</a:t>
+            </a:r>
+          </a:p>
+        </p:txBody>
+      </p:sp>
+      <p:sp>
+        <p:nvSpPr>
+          <p:cNvPr id="6" name="TextBox 5"/>
+          <p:cNvSpPr txBox="1"/>
+          <p:nvPr/>
+        </p:nvSpPr>
+        <p:spPr>
+          <a:xfrm>
+            <a:off x="685800" y="6291072"/>
+            <a:ext cx="4572000" cy="320040"/>
+          </a:xfrm>
+          <a:prstGeom prst="rect">
+            <a:avLst/>
+          </a:prstGeom>
+          <a:noFill/>
+        </p:spPr>
+        <p:txBody>
+          <a:bodyPr wrap="square" anchor="t">
+            <a:spAutoFit/>
+          </a:bodyPr>
+          <a:lstStyle/>
+          <a:p>
+            <a:pPr algn="l">
+              <a:spcAft>
+                <a:spcPts val="0"/>
+              </a:spcAft>
+            </a:pPr>
+            <a:r>
+              <a:rPr sz="1100" b="0" i="0">
+                <a:solidFill>
+                  <a:srgbClr val="595959"/>
+                </a:solidFill>
+                <a:latin typeface="Calibri"/>
+              </a:rPr>
+              <a:t>The measurement</a:t>
+            </a:r>
+          </a:p>
+        </p:txBody>
+      </p:sp>
+      <p:sp>
+        <p:nvSpPr>
+          <p:cNvPr id="7" name="TextBox 6"/>
+          <p:cNvSpPr txBox="1"/>
+          <p:nvPr/>
+        </p:nvSpPr>
+        <p:spPr>
+          <a:xfrm>
+            <a:off x="10591495" y="6291072"/>
+            <a:ext cx="914400" cy="320040"/>
+          </a:xfrm>
+          <a:prstGeom prst="rect">
+            <a:avLst/>
+          </a:prstGeom>
+          <a:noFill/>
+        </p:spPr>
+        <p:txBody>
+          <a:bodyPr wrap="square" anchor="t">
+            <a:spAutoFit/>
+          </a:bodyPr>
+          <a:lstStyle/>
+          <a:p>
+            <a:pPr algn="r">
+              <a:spcAft>
+                <a:spcPts val="0"/>
+              </a:spcAft>
+            </a:pPr>
+            <a:r>
+              <a:rPr sz="1100" b="0" i="0">
+                <a:solidFill>
+                  <a:srgbClr val="595959"/>
+                </a:solidFill>
+                <a:latin typeface="Calibri"/>
+              </a:rPr>
+              <a:t>19</a:t>
             </a:r>
           </a:p>
         </p:txBody>
@@ -7521,8 +7802,8 @@
         </p:blipFill>
         <p:spPr>
           <a:xfrm>
-            <a:off x="685800" y="365759"/>
-            <a:ext cx="420624" cy="420624"/>
+            <a:off x="1188720" y="2148840"/>
+            <a:ext cx="658368" cy="658368"/>
           </a:xfrm>
           <a:prstGeom prst="rect">
             <a:avLst/>
@@ -7537,8 +7818,8 @@
         </p:nvSpPr>
         <p:spPr>
           <a:xfrm>
-            <a:off x="1289304" y="310896"/>
-            <a:ext cx="10216591" cy="822960"/>
+            <a:off x="1188720" y="2971800"/>
+            <a:ext cx="8229600" cy="1828800"/>
           </a:xfrm>
           <a:prstGeom prst="rect">
             <a:avLst/>
@@ -7553,299 +7834,49 @@
           <a:p>
             <a:pPr algn="l">
               <a:spcAft>
-                <a:spcPts val="0"/>
-              </a:spcAft>
-            </a:pPr>
-            <a:r>
-              <a:rPr sz="2600" b="1" i="0">
+                <a:spcPts val="200"/>
+              </a:spcAft>
+            </a:pPr>
+            <a:r>
+              <a:rPr sz="4000" b="1" i="0">
+                <a:solidFill>
+                  <a:srgbClr val="2E75B6"/>
+                </a:solidFill>
+                <a:latin typeface="Calibri"/>
+              </a:rPr>
+              <a:t>04</a:t>
+            </a:r>
+          </a:p>
+          <a:p>
+            <a:pPr>
+              <a:spcAft>
+                <a:spcPts val="800"/>
+              </a:spcAft>
+            </a:pPr>
+            <a:r>
+              <a:rPr sz="3000" b="1" i="0">
                 <a:solidFill>
                   <a:srgbClr val="1F4E79"/>
                 </a:solidFill>
                 <a:latin typeface="Calibri"/>
               </a:rPr>
-              <a:t>Media enters the mean-field model as a field on the measured observable</a:t>
-            </a:r>
-          </a:p>
-        </p:txBody>
-      </p:sp>
-      <p:sp>
-        <p:nvSpPr>
-          <p:cNvPr id="4" name="TextBox 3"/>
-          <p:cNvSpPr txBox="1"/>
-          <p:nvPr/>
-        </p:nvSpPr>
-        <p:spPr>
-          <a:xfrm>
-            <a:off x="685800" y="1463040"/>
-            <a:ext cx="10820095" cy="914400"/>
-          </a:xfrm>
-          <a:prstGeom prst="rect">
-            <a:avLst/>
-          </a:prstGeom>
-          <a:noFill/>
-        </p:spPr>
-        <p:txBody>
-          <a:bodyPr wrap="square" anchor="t">
-            <a:spAutoFit/>
-          </a:bodyPr>
-          <a:lstStyle/>
-          <a:p>
-            <a:pPr algn="l">
-              <a:spcAft>
-                <a:spcPts val="0"/>
-              </a:spcAft>
-            </a:pPr>
-            <a:r>
-              <a:rPr sz="1900" b="0" i="0">
-                <a:solidFill>
-                  <a:srgbClr val="1A1A1A"/>
-                </a:solidFill>
-                <a:latin typeface="Calibri"/>
-              </a:rPr>
-              <a:t>Each person holds an opinion ±1, is pulled toward their neighbours with strength J, and is pushed by media with field h:</a:t>
-            </a:r>
-          </a:p>
-        </p:txBody>
-      </p:sp>
-      <p:sp>
-        <p:nvSpPr>
-          <p:cNvPr id="5" name="TextBox 4"/>
-          <p:cNvSpPr txBox="1"/>
-          <p:nvPr/>
-        </p:nvSpPr>
-        <p:spPr>
-          <a:xfrm>
-            <a:off x="685800" y="2240280"/>
-            <a:ext cx="10820095" cy="640080"/>
-          </a:xfrm>
-          <a:prstGeom prst="rect">
-            <a:avLst/>
-          </a:prstGeom>
-          <a:noFill/>
-        </p:spPr>
-        <p:txBody>
-          <a:bodyPr wrap="square" anchor="t">
-            <a:spAutoFit/>
-          </a:bodyPr>
-          <a:lstStyle/>
-          <a:p>
-            <a:pPr algn="ctr">
-              <a:spcAft>
-                <a:spcPts val="0"/>
-              </a:spcAft>
-            </a:pPr>
-            <a:r>
-              <a:rPr sz="2600" b="1" i="0">
-                <a:solidFill>
-                  <a:srgbClr val="1F4E79"/>
-                </a:solidFill>
-                <a:latin typeface="Calibri"/>
-              </a:rPr>
-              <a:t>m  =  tanh( βJ m + h ),        h  =  α X</a:t>
-            </a:r>
-          </a:p>
-        </p:txBody>
-      </p:sp>
-      <p:sp>
-        <p:nvSpPr>
-          <p:cNvPr id="6" name="TextBox 5"/>
-          <p:cNvSpPr txBox="1"/>
-          <p:nvPr/>
-        </p:nvSpPr>
-        <p:spPr>
-          <a:xfrm>
-            <a:off x="685800" y="2971800"/>
-            <a:ext cx="10820095" cy="731520"/>
-          </a:xfrm>
-          <a:prstGeom prst="rect">
-            <a:avLst/>
-          </a:prstGeom>
-          <a:noFill/>
-        </p:spPr>
-        <p:txBody>
-          <a:bodyPr wrap="square" anchor="t">
-            <a:spAutoFit/>
-          </a:bodyPr>
-          <a:lstStyle/>
-          <a:p>
-            <a:pPr algn="l">
-              <a:spcAft>
-                <a:spcPts val="0"/>
-              </a:spcAft>
-            </a:pPr>
-            <a:r>
-              <a:rPr sz="1900" b="0" i="0">
-                <a:solidFill>
-                  <a:srgbClr val="1A1A1A"/>
-                </a:solidFill>
-                <a:latin typeface="Calibri"/>
-              </a:rPr>
-              <a:t>where X is the measured observable and α the unknown coupling. Expanding artanh(m) ≈ m + m³/3:</a:t>
-            </a:r>
-          </a:p>
-        </p:txBody>
-      </p:sp>
-      <p:sp>
-        <p:nvSpPr>
-          <p:cNvPr id="7" name="TextBox 6"/>
-          <p:cNvSpPr txBox="1"/>
-          <p:nvPr/>
-        </p:nvSpPr>
-        <p:spPr>
-          <a:xfrm>
-            <a:off x="685800" y="3657600"/>
-            <a:ext cx="10820095" cy="640080"/>
-          </a:xfrm>
-          <a:prstGeom prst="rect">
-            <a:avLst/>
-          </a:prstGeom>
-          <a:noFill/>
-        </p:spPr>
-        <p:txBody>
-          <a:bodyPr wrap="square" anchor="t">
-            <a:spAutoFit/>
-          </a:bodyPr>
-          <a:lstStyle/>
-          <a:p>
-            <a:pPr algn="ctr">
-              <a:spcAft>
-                <a:spcPts val="0"/>
-              </a:spcAft>
-            </a:pPr>
-            <a:r>
-              <a:rPr sz="2400" b="1" i="0">
-                <a:solidFill>
-                  <a:srgbClr val="1F4E79"/>
-                </a:solidFill>
-                <a:latin typeface="Calibri"/>
-              </a:rPr>
-              <a:t>F(m) = a m² + b m⁴ − h m,        a = (1 − βJ)/2,        b = 1/12</a:t>
-            </a:r>
-          </a:p>
-        </p:txBody>
-      </p:sp>
-      <p:sp>
-        <p:nvSpPr>
-          <p:cNvPr id="8" name="TextBox 7"/>
-          <p:cNvSpPr txBox="1"/>
-          <p:nvPr/>
-        </p:nvSpPr>
-        <p:spPr>
-          <a:xfrm>
-            <a:off x="685800" y="4434840"/>
-            <a:ext cx="10820095" cy="1097280"/>
-          </a:xfrm>
-          <a:prstGeom prst="rect">
-            <a:avLst/>
-          </a:prstGeom>
-          <a:noFill/>
-        </p:spPr>
-        <p:txBody>
-          <a:bodyPr wrap="square" anchor="t">
-            <a:spAutoFit/>
-          </a:bodyPr>
-          <a:lstStyle/>
-          <a:p>
-            <a:pPr algn="l">
-              <a:spcAft>
-                <a:spcPts val="0"/>
-              </a:spcAft>
-            </a:pPr>
-            <a:r>
-              <a:rPr sz="1700" b="1">
+              <a:t>The physics</a:t>
+            </a:r>
+          </a:p>
+          <a:p>
+            <a:pPr>
+              <a:spcAft>
+                <a:spcPts val="800"/>
+              </a:spcAft>
+            </a:pPr>
+            <a:r>
+              <a:rPr sz="1700" b="0" i="0">
                 <a:solidFill>
                   <a:srgbClr val="595959"/>
                 </a:solidFill>
                 <a:latin typeface="Calibri"/>
               </a:rPr>
-              <a:t>Coefficients derived from the self-consistency condition. </a:t>
-            </a:r>
-            <a:r>
-              <a:rPr sz="1700" b="0">
-                <a:solidFill>
-                  <a:srgbClr val="595959"/>
-                </a:solidFill>
-                <a:latin typeface="Calibri"/>
-              </a:rPr>
-              <a:t>The proposal carried a = 1 − βJ, b = (βJ)³/3, which do not follow from it. The solver reproduces the exact exponents 1/2, 1 and 3.</a:t>
-            </a:r>
-          </a:p>
-        </p:txBody>
-      </p:sp>
-      <p:sp>
-        <p:nvSpPr>
-          <p:cNvPr id="9" name="TextBox 8"/>
-          <p:cNvSpPr txBox="1"/>
-          <p:nvPr/>
-        </p:nvSpPr>
-        <p:spPr>
-          <a:xfrm>
-            <a:off x="685800" y="6291072"/>
-            <a:ext cx="4572000" cy="320040"/>
-          </a:xfrm>
-          <a:prstGeom prst="rect">
-            <a:avLst/>
-          </a:prstGeom>
-          <a:noFill/>
-        </p:spPr>
-        <p:txBody>
-          <a:bodyPr wrap="square" anchor="t">
-            <a:spAutoFit/>
-          </a:bodyPr>
-          <a:lstStyle/>
-          <a:p>
-            <a:pPr algn="l">
-              <a:spcAft>
-                <a:spcPts val="0"/>
-              </a:spcAft>
-            </a:pPr>
-            <a:r>
-              <a:rPr sz="1100" b="0" i="0">
-                <a:solidFill>
-                  <a:srgbClr val="595959"/>
-                </a:solidFill>
-                <a:latin typeface="Calibri"/>
-              </a:rPr>
-              <a:t>The physics</a:t>
-            </a:r>
-          </a:p>
-        </p:txBody>
-      </p:sp>
-      <p:sp>
-        <p:nvSpPr>
-          <p:cNvPr id="10" name="TextBox 9"/>
-          <p:cNvSpPr txBox="1"/>
-          <p:nvPr/>
-        </p:nvSpPr>
-        <p:spPr>
-          <a:xfrm>
-            <a:off x="10591495" y="6291072"/>
-            <a:ext cx="914400" cy="320040"/>
-          </a:xfrm>
-          <a:prstGeom prst="rect">
-            <a:avLst/>
-          </a:prstGeom>
-          <a:noFill/>
-        </p:spPr>
-        <p:txBody>
-          <a:bodyPr wrap="square" anchor="t">
-            <a:spAutoFit/>
-          </a:bodyPr>
-          <a:lstStyle/>
-          <a:p>
-            <a:pPr algn="r">
-              <a:spcAft>
-                <a:spcPts val="0"/>
-              </a:spcAft>
-            </a:pPr>
-            <a:r>
-              <a:rPr sz="1100" b="0" i="0">
-                <a:solidFill>
-                  <a:srgbClr val="595959"/>
-                </a:solidFill>
-                <a:latin typeface="Calibri"/>
-              </a:rPr>
-              <a:t>20</a:t>
+              <a:t>What a measured field is worth.</a:t>
             </a:r>
           </a:p>
         </p:txBody>
@@ -7870,7 +7901,7 @@
       <p:grpSpPr/>
       <p:pic>
         <p:nvPicPr>
-          <p:cNvPr id="2" name="Picture 1" descr="x-circle.png"/>
+          <p:cNvPr id="2" name="Picture 1" descr="atom.png"/>
           <p:cNvPicPr>
             <a:picLocks noChangeAspect="1"/>
           </p:cNvPicPr>
@@ -7926,7 +7957,7 @@
                 </a:solidFill>
                 <a:latin typeface="Calibri"/>
               </a:rPr>
-              <a:t>The corpus does not identify the coupling, so no value is quoted</a:t>
+              <a:t>Media enters the mean-field model as a field on the measured observable</a:t>
             </a:r>
           </a:p>
         </p:txBody>
@@ -7939,8 +7970,8 @@
         </p:nvSpPr>
         <p:spPr>
           <a:xfrm>
-            <a:off x="685800" y="1600200"/>
-            <a:ext cx="6035040" cy="3291840"/>
+            <a:off x="685800" y="1463040"/>
+            <a:ext cx="10820095" cy="914400"/>
           </a:xfrm>
           <a:prstGeom prst="rect">
             <a:avLst/>
@@ -7955,81 +7986,148 @@
           <a:p>
             <a:pPr algn="l">
               <a:spcAft>
-                <a:spcPts val="1400"/>
-              </a:spcAft>
-            </a:pPr>
-            <a:r>
-              <a:rPr sz="2000" b="1">
+                <a:spcPts val="0"/>
+              </a:spcAft>
+            </a:pPr>
+            <a:r>
+              <a:rPr sz="1900" b="0" i="0">
                 <a:solidFill>
                   <a:srgbClr val="1A1A1A"/>
                 </a:solidFill>
                 <a:latin typeface="Calibri"/>
               </a:rPr>
-              <a:t>What was tried. </a:t>
-            </a:r>
-            <a:r>
-              <a:rPr sz="2000" b="0">
+              <a:t>Each person holds an opinion ±1, is pulled toward their neighbours with strength J, and is pushed by media with field h:</a:t>
+            </a:r>
+          </a:p>
+        </p:txBody>
+      </p:sp>
+      <p:sp>
+        <p:nvSpPr>
+          <p:cNvPr id="5" name="TextBox 4"/>
+          <p:cNvSpPr txBox="1"/>
+          <p:nvPr/>
+        </p:nvSpPr>
+        <p:spPr>
+          <a:xfrm>
+            <a:off x="685800" y="2240280"/>
+            <a:ext cx="10820095" cy="640080"/>
+          </a:xfrm>
+          <a:prstGeom prst="rect">
+            <a:avLst/>
+          </a:prstGeom>
+          <a:noFill/>
+        </p:spPr>
+        <p:txBody>
+          <a:bodyPr wrap="square" anchor="t">
+            <a:spAutoFit/>
+          </a:bodyPr>
+          <a:lstStyle/>
+          <a:p>
+            <a:pPr algn="ctr">
+              <a:spcAft>
+                <a:spcPts val="0"/>
+              </a:spcAft>
+            </a:pPr>
+            <a:r>
+              <a:rPr sz="2600" b="1" i="0">
+                <a:solidFill>
+                  <a:srgbClr val="1F4E79"/>
+                </a:solidFill>
+                <a:latin typeface="Calibri"/>
+              </a:rPr>
+              <a:t>m  =  tanh( βJ m + h ),        h  =  α X</a:t>
+            </a:r>
+          </a:p>
+        </p:txBody>
+      </p:sp>
+      <p:sp>
+        <p:nvSpPr>
+          <p:cNvPr id="6" name="TextBox 5"/>
+          <p:cNvSpPr txBox="1"/>
+          <p:nvPr/>
+        </p:nvSpPr>
+        <p:spPr>
+          <a:xfrm>
+            <a:off x="685800" y="2971800"/>
+            <a:ext cx="10820095" cy="731520"/>
+          </a:xfrm>
+          <a:prstGeom prst="rect">
+            <a:avLst/>
+          </a:prstGeom>
+          <a:noFill/>
+        </p:spPr>
+        <p:txBody>
+          <a:bodyPr wrap="square" anchor="t">
+            <a:spAutoFit/>
+          </a:bodyPr>
+          <a:lstStyle/>
+          <a:p>
+            <a:pPr algn="l">
+              <a:spcAft>
+                <a:spcPts val="0"/>
+              </a:spcAft>
+            </a:pPr>
+            <a:r>
+              <a:rPr sz="1900" b="0" i="0">
                 <a:solidFill>
                   <a:srgbClr val="1A1A1A"/>
                 </a:solidFill>
                 <a:latin typeface="Calibri"/>
               </a:rPr>
-              <a:t>Regress the outcome on the measured index and read off α.</a:t>
-            </a:r>
-          </a:p>
-          <a:p>
-            <a:pPr>
-              <a:spcAft>
-                <a:spcPts val="1400"/>
-              </a:spcAft>
-            </a:pPr>
-            <a:r>
-              <a:rPr sz="2000" b="1">
-                <a:solidFill>
-                  <a:srgbClr val="1A1A1A"/>
-                </a:solidFill>
-                <a:latin typeface="Calibri"/>
-              </a:rPr>
-              <a:t>What happened. </a:t>
-            </a:r>
-            <a:r>
-              <a:rPr sz="2000" b="0">
-                <a:solidFill>
-                  <a:srgbClr val="1A1A1A"/>
-                </a:solidFill>
-                <a:latin typeface="Calibri"/>
-              </a:rPr>
-              <a:t>The fit performs worse than the sample mean out of sample, and the estimate scales inversely with a coupling βJ that no measurement here fixes.</a:t>
-            </a:r>
-          </a:p>
-          <a:p>
-            <a:pPr>
-              <a:spcAft>
-                <a:spcPts val="0"/>
-              </a:spcAft>
-            </a:pPr>
-            <a:r>
-              <a:rPr sz="2000" b="1" i="0">
-                <a:solidFill>
-                  <a:srgbClr val="C0392B"/>
-                </a:solidFill>
-                <a:latin typeface="Calibri"/>
-              </a:rPr>
-              <a:t>So no value of α-hat appears anywhere — not in a table, a caption, or “for illustration”.</a:t>
-            </a:r>
-          </a:p>
-        </p:txBody>
-      </p:sp>
-      <p:sp>
-        <p:nvSpPr>
-          <p:cNvPr id="5" name="TextBox 4"/>
-          <p:cNvSpPr txBox="1"/>
-          <p:nvPr/>
-        </p:nvSpPr>
-        <p:spPr>
-          <a:xfrm>
-            <a:off x="7360920" y="1691640"/>
-            <a:ext cx="4160520" cy="2743200"/>
+              <a:t>where X is the measured observable and α the unknown coupling. Expanding artanh(m) ≈ m + m³/3:</a:t>
+            </a:r>
+          </a:p>
+        </p:txBody>
+      </p:sp>
+      <p:sp>
+        <p:nvSpPr>
+          <p:cNvPr id="7" name="TextBox 6"/>
+          <p:cNvSpPr txBox="1"/>
+          <p:nvPr/>
+        </p:nvSpPr>
+        <p:spPr>
+          <a:xfrm>
+            <a:off x="685800" y="3657600"/>
+            <a:ext cx="10820095" cy="640080"/>
+          </a:xfrm>
+          <a:prstGeom prst="rect">
+            <a:avLst/>
+          </a:prstGeom>
+          <a:noFill/>
+        </p:spPr>
+        <p:txBody>
+          <a:bodyPr wrap="square" anchor="t">
+            <a:spAutoFit/>
+          </a:bodyPr>
+          <a:lstStyle/>
+          <a:p>
+            <a:pPr algn="ctr">
+              <a:spcAft>
+                <a:spcPts val="0"/>
+              </a:spcAft>
+            </a:pPr>
+            <a:r>
+              <a:rPr sz="2400" b="1" i="0">
+                <a:solidFill>
+                  <a:srgbClr val="1F4E79"/>
+                </a:solidFill>
+                <a:latin typeface="Calibri"/>
+              </a:rPr>
+              <a:t>F(m) = a m² + b m⁴ − h m,        a = (1 − βJ)/2,        b = 1/12</a:t>
+            </a:r>
+          </a:p>
+        </p:txBody>
+      </p:sp>
+      <p:sp>
+        <p:nvSpPr>
+          <p:cNvPr id="8" name="TextBox 7"/>
+          <p:cNvSpPr txBox="1"/>
+          <p:nvPr/>
+        </p:nvSpPr>
+        <p:spPr>
+          <a:xfrm>
+            <a:off x="685800" y="4434840"/>
+            <a:ext cx="10820095" cy="1097280"/>
           </a:xfrm>
           <a:prstGeom prst="rect">
             <a:avLst/>
@@ -8044,40 +8142,33 @@
           <a:p>
             <a:pPr algn="l">
               <a:spcAft>
-                <a:spcPts val="1400"/>
-              </a:spcAft>
-            </a:pPr>
-            <a:r>
-              <a:rPr sz="1700" b="0" i="0">
+                <a:spcPts val="0"/>
+              </a:spcAft>
+            </a:pPr>
+            <a:r>
+              <a:rPr sz="1700" b="1">
                 <a:solidFill>
                   <a:srgbClr val="595959"/>
                 </a:solidFill>
                 <a:latin typeface="Calibri"/>
               </a:rPr>
-              <a:t>Reporting an unidentified coupling as though it were measured would be the failure here. Declining to quote it is not.</a:t>
-            </a:r>
-          </a:p>
-          <a:p>
-            <a:pPr>
-              <a:spcAft>
-                <a:spcPts val="0"/>
-              </a:spcAft>
-            </a:pPr>
-            <a:r>
-              <a:rPr sz="1700" b="0" i="0">
+              <a:t>Coefficients derived from the self-consistency condition. </a:t>
+            </a:r>
+            <a:r>
+              <a:rPr sz="1700" b="0">
                 <a:solidFill>
                   <a:srgbClr val="595959"/>
                 </a:solidFill>
                 <a:latin typeface="Calibri"/>
               </a:rPr>
-              <a:t>What replaces it is a statement that does not need the fit at all.</a:t>
-            </a:r>
-          </a:p>
-        </p:txBody>
-      </p:sp>
-      <p:sp>
-        <p:nvSpPr>
-          <p:cNvPr id="6" name="TextBox 5"/>
+              <a:t>The proposal carried a = 1 − βJ, b = (βJ)³/3, which do not follow from it. The solver reproduces the exact exponents 1/2, 1 and 3.</a:t>
+            </a:r>
+          </a:p>
+        </p:txBody>
+      </p:sp>
+      <p:sp>
+        <p:nvSpPr>
+          <p:cNvPr id="9" name="TextBox 8"/>
           <p:cNvSpPr txBox="1"/>
           <p:nvPr/>
         </p:nvSpPr>
@@ -8116,7 +8207,7 @@
       </p:sp>
       <p:sp>
         <p:nvSpPr>
-          <p:cNvPr id="7" name="TextBox 6"/>
+          <p:cNvPr id="10" name="TextBox 9"/>
           <p:cNvSpPr txBox="1"/>
           <p:nvPr/>
         </p:nvSpPr>
@@ -8173,7 +8264,7 @@
       <p:grpSpPr/>
       <p:pic>
         <p:nvPicPr>
-          <p:cNvPr id="2" name="Picture 1" descr="ruler.png"/>
+          <p:cNvPr id="2" name="Picture 1" descr="x-circle.png"/>
           <p:cNvPicPr>
             <a:picLocks noChangeAspect="1"/>
           </p:cNvPicPr>
@@ -8229,35 +8320,100 @@
                 </a:solidFill>
                 <a:latin typeface="Calibri"/>
               </a:rPr>
-              <a:t>Any content observable must clear a bound to drive a transition</a:t>
-            </a:r>
-          </a:p>
-        </p:txBody>
-      </p:sp>
-      <p:pic>
-        <p:nvPicPr>
-          <p:cNvPr id="4" name="Picture 3" descr="F6_alpha_required.png"/>
-          <p:cNvPicPr>
-            <a:picLocks noChangeAspect="1"/>
-          </p:cNvPicPr>
-          <p:nvPr/>
-        </p:nvPicPr>
-        <p:blipFill>
-          <a:blip r:embed="rId3"/>
-          <a:stretch>
-            <a:fillRect/>
-          </a:stretch>
-        </p:blipFill>
-        <p:spPr>
-          <a:xfrm>
-            <a:off x="685800" y="1463040"/>
-            <a:ext cx="4618191" cy="3154680"/>
-          </a:xfrm>
-          <a:prstGeom prst="rect">
-            <a:avLst/>
-          </a:prstGeom>
-        </p:spPr>
-      </p:pic>
+              <a:t>The corpus does not identify the coupling, so no value is quoted</a:t>
+            </a:r>
+          </a:p>
+        </p:txBody>
+      </p:sp>
+      <p:sp>
+        <p:nvSpPr>
+          <p:cNvPr id="4" name="TextBox 3"/>
+          <p:cNvSpPr txBox="1"/>
+          <p:nvPr/>
+        </p:nvSpPr>
+        <p:spPr>
+          <a:xfrm>
+            <a:off x="685800" y="1600200"/>
+            <a:ext cx="6035040" cy="3291840"/>
+          </a:xfrm>
+          <a:prstGeom prst="rect">
+            <a:avLst/>
+          </a:prstGeom>
+          <a:noFill/>
+        </p:spPr>
+        <p:txBody>
+          <a:bodyPr wrap="square" anchor="t">
+            <a:spAutoFit/>
+          </a:bodyPr>
+          <a:lstStyle/>
+          <a:p>
+            <a:pPr algn="l">
+              <a:spcAft>
+                <a:spcPts val="1400"/>
+              </a:spcAft>
+            </a:pPr>
+            <a:r>
+              <a:rPr sz="2000" b="1">
+                <a:solidFill>
+                  <a:srgbClr val="1A1A1A"/>
+                </a:solidFill>
+                <a:latin typeface="Calibri"/>
+              </a:rPr>
+              <a:t>What was tried. </a:t>
+            </a:r>
+            <a:r>
+              <a:rPr sz="2000" b="0">
+                <a:solidFill>
+                  <a:srgbClr val="1A1A1A"/>
+                </a:solidFill>
+                <a:latin typeface="Calibri"/>
+              </a:rPr>
+              <a:t>Regress the outcome on the measured index and read off α.</a:t>
+            </a:r>
+          </a:p>
+          <a:p>
+            <a:pPr>
+              <a:spcAft>
+                <a:spcPts val="1400"/>
+              </a:spcAft>
+            </a:pPr>
+            <a:r>
+              <a:rPr sz="2000" b="1">
+                <a:solidFill>
+                  <a:srgbClr val="1A1A1A"/>
+                </a:solidFill>
+                <a:latin typeface="Calibri"/>
+              </a:rPr>
+              <a:t>What happened. </a:t>
+            </a:r>
+            <a:r>
+              <a:rPr sz="2000" b="0">
+                <a:solidFill>
+                  <a:srgbClr val="1A1A1A"/>
+                </a:solidFill>
+                <a:latin typeface="Calibri"/>
+              </a:rPr>
+              <a:t>The fit performs worse than the sample mean out of sample, and the estimate scales inversely with a coupling βJ that no measurement here fixes.</a:t>
+            </a:r>
+          </a:p>
+          <a:p>
+            <a:pPr>
+              <a:spcAft>
+                <a:spcPts val="0"/>
+              </a:spcAft>
+            </a:pPr>
+            <a:r>
+              <a:rPr sz="2000" b="1" i="0">
+                <a:solidFill>
+                  <a:srgbClr val="C0392B"/>
+                </a:solidFill>
+                <a:latin typeface="Calibri"/>
+              </a:rPr>
+              <a:t>So no value of α-hat appears anywhere — not in a table, a caption, or “for illustration”.</a:t>
+            </a:r>
+          </a:p>
+        </p:txBody>
+      </p:sp>
       <p:sp>
         <p:nvSpPr>
           <p:cNvPr id="5" name="TextBox 4"/>
@@ -8266,51 +8422,49 @@
         </p:nvSpPr>
         <p:spPr>
           <a:xfrm>
-            <a:off x="6720840" y="1737360"/>
-            <a:ext cx="4800600" cy="822960"/>
-          </a:xfrm>
-          <a:prstGeom prst="rect">
-            <a:avLst/>
-          </a:prstGeom>
-          <a:noFill/>
-        </p:spPr>
-        <p:txBody>
-          <a:bodyPr wrap="square" anchor="t">
-            <a:spAutoFit/>
-          </a:bodyPr>
-          <a:lstStyle/>
-          <a:p>
-            <a:pPr algn="ctr">
-              <a:spcAft>
-                <a:spcPts val="0"/>
-              </a:spcAft>
-            </a:pPr>
-            <a:r>
-              <a:rPr sz="3200" b="1">
-                <a:solidFill>
-                  <a:srgbClr val="1F4E79"/>
-                </a:solidFill>
-                <a:latin typeface="Calibri"/>
-              </a:rPr>
-              <a:t>α  ≥  h</a:t>
-            </a:r>
-            <a:r>
-              <a:rPr sz="3200" b="1" baseline="-25000">
-                <a:solidFill>
-                  <a:srgbClr val="1F4E79"/>
-                </a:solidFill>
-                <a:latin typeface="Calibri"/>
-              </a:rPr>
-              <a:t>c</a:t>
-            </a:r>
-            <a:r>
-              <a:rPr sz="3200" b="1">
-                <a:solidFill>
-                  <a:srgbClr val="1F4E79"/>
-                </a:solidFill>
-                <a:latin typeface="Calibri"/>
-              </a:rPr>
-              <a:t>(βJ) / ΔX</a:t>
+            <a:off x="7360920" y="1691640"/>
+            <a:ext cx="4160520" cy="2743200"/>
+          </a:xfrm>
+          <a:prstGeom prst="rect">
+            <a:avLst/>
+          </a:prstGeom>
+          <a:noFill/>
+        </p:spPr>
+        <p:txBody>
+          <a:bodyPr wrap="square" anchor="t">
+            <a:spAutoFit/>
+          </a:bodyPr>
+          <a:lstStyle/>
+          <a:p>
+            <a:pPr algn="l">
+              <a:spcAft>
+                <a:spcPts val="1400"/>
+              </a:spcAft>
+            </a:pPr>
+            <a:r>
+              <a:rPr sz="1700" b="0" i="0">
+                <a:solidFill>
+                  <a:srgbClr val="595959"/>
+                </a:solidFill>
+                <a:latin typeface="Calibri"/>
+              </a:rPr>
+              <a:t>Reporting an unidentified coupling as though it were measured would be the failure here. Declining to quote it is not.</a:t>
+            </a:r>
+          </a:p>
+          <a:p>
+            <a:pPr>
+              <a:spcAft>
+                <a:spcPts val="0"/>
+              </a:spcAft>
+            </a:pPr>
+            <a:r>
+              <a:rPr sz="1700" b="0" i="0">
+                <a:solidFill>
+                  <a:srgbClr val="595959"/>
+                </a:solidFill>
+                <a:latin typeface="Calibri"/>
+              </a:rPr>
+              <a:t>What replaces it is a statement that does not need the fit at all.</a:t>
             </a:r>
           </a:p>
         </p:txBody>
@@ -8318,93 +8472,6 @@
       <p:sp>
         <p:nvSpPr>
           <p:cNvPr id="6" name="TextBox 5"/>
-          <p:cNvSpPr txBox="1"/>
-          <p:nvPr/>
-        </p:nvSpPr>
-        <p:spPr>
-          <a:xfrm>
-            <a:off x="6720840" y="2697480"/>
-            <a:ext cx="4800600" cy="1920240"/>
-          </a:xfrm>
-          <a:prstGeom prst="rect">
-            <a:avLst/>
-          </a:prstGeom>
-          <a:noFill/>
-        </p:spPr>
-        <p:txBody>
-          <a:bodyPr wrap="square" anchor="t">
-            <a:spAutoFit/>
-          </a:bodyPr>
-          <a:lstStyle/>
-          <a:p>
-            <a:pPr algn="l">
-              <a:spcAft>
-                <a:spcPts val="0"/>
-              </a:spcAft>
-            </a:pPr>
-            <a:r>
-              <a:rPr sz="1800" b="0" i="0">
-                <a:solidFill>
-                  <a:srgbClr val="1A1A1A"/>
-                </a:solidFill>
-                <a:latin typeface="Calibri"/>
-              </a:rPr>
-              <a:t>Rather than fitting α and hoping it clears zero, this states what α would have to be for the mechanism to work at all — for any candidate observable, before a corpus exists.</a:t>
-            </a:r>
-          </a:p>
-        </p:txBody>
-      </p:sp>
-      <p:sp>
-        <p:nvSpPr>
-          <p:cNvPr id="7" name="TextBox 6"/>
-          <p:cNvSpPr txBox="1"/>
-          <p:nvPr/>
-        </p:nvSpPr>
-        <p:spPr>
-          <a:xfrm>
-            <a:off x="685800" y="4892040"/>
-            <a:ext cx="10820095" cy="640080"/>
-          </a:xfrm>
-          <a:prstGeom prst="rect">
-            <a:avLst/>
-          </a:prstGeom>
-          <a:noFill/>
-        </p:spPr>
-        <p:txBody>
-          <a:bodyPr wrap="square" anchor="t">
-            <a:spAutoFit/>
-          </a:bodyPr>
-          <a:lstStyle/>
-          <a:p>
-            <a:pPr algn="ctr">
-              <a:spcAft>
-                <a:spcPts val="0"/>
-              </a:spcAft>
-            </a:pPr>
-            <a:r>
-              <a:rPr sz="1800" b="0">
-                <a:solidFill>
-                  <a:srgbClr val="1A1A1A"/>
-                </a:solidFill>
-                <a:latin typeface="Calibri"/>
-              </a:rPr>
-              <a:t>Measured spread ΔX = 0.1241  ⇒  α ≥ 0.169 at βJ = 1.10,   1.655 at 1.50,   </a:t>
-            </a:r>
-            <a:r>
-              <a:rPr sz="1800" b="1">
-                <a:solidFill>
-                  <a:srgbClr val="1F4E79"/>
-                </a:solidFill>
-                <a:latin typeface="Calibri"/>
-              </a:rPr>
-              <a:t>4.294 at 2.00</a:t>
-            </a:r>
-          </a:p>
-        </p:txBody>
-      </p:sp>
-      <p:sp>
-        <p:nvSpPr>
-          <p:cNvPr id="8" name="TextBox 7"/>
           <p:cNvSpPr txBox="1"/>
           <p:nvPr/>
         </p:nvSpPr>
@@ -8443,7 +8510,7 @@
       </p:sp>
       <p:sp>
         <p:nvSpPr>
-          <p:cNvPr id="9" name="TextBox 8"/>
+          <p:cNvPr id="7" name="TextBox 6"/>
           <p:cNvSpPr txBox="1"/>
           <p:nvPr/>
         </p:nvSpPr>
@@ -8500,7 +8567,7 @@
       <p:grpSpPr/>
       <p:pic>
         <p:nvPicPr>
-          <p:cNvPr id="2" name="Picture 1" descr="flag-banner.png"/>
+          <p:cNvPr id="2" name="Picture 1" descr="ruler.png"/>
           <p:cNvPicPr>
             <a:picLocks noChangeAspect="1"/>
           </p:cNvPicPr>
@@ -8514,8 +8581,8 @@
         </p:blipFill>
         <p:spPr>
           <a:xfrm>
-            <a:off x="1188720" y="2148840"/>
-            <a:ext cx="658368" cy="658368"/>
+            <a:off x="685800" y="365759"/>
+            <a:ext cx="420624" cy="420624"/>
           </a:xfrm>
           <a:prstGeom prst="rect">
             <a:avLst/>
@@ -8530,8 +8597,8 @@
         </p:nvSpPr>
         <p:spPr>
           <a:xfrm>
-            <a:off x="1188720" y="2971800"/>
-            <a:ext cx="8229600" cy="1828800"/>
+            <a:off x="1289304" y="310896"/>
+            <a:ext cx="10216591" cy="822960"/>
           </a:xfrm>
           <a:prstGeom prst="rect">
             <a:avLst/>
@@ -8546,49 +8613,263 @@
           <a:p>
             <a:pPr algn="l">
               <a:spcAft>
-                <a:spcPts val="200"/>
-              </a:spcAft>
-            </a:pPr>
-            <a:r>
-              <a:rPr sz="4000" b="1" i="0">
-                <a:solidFill>
-                  <a:srgbClr val="2E75B6"/>
-                </a:solidFill>
-                <a:latin typeface="Calibri"/>
-              </a:rPr>
-              <a:t>05</a:t>
-            </a:r>
-          </a:p>
-          <a:p>
-            <a:pPr>
-              <a:spcAft>
-                <a:spcPts val="800"/>
-              </a:spcAft>
-            </a:pPr>
-            <a:r>
-              <a:rPr sz="3000" b="1" i="0">
+                <a:spcPts val="0"/>
+              </a:spcAft>
+            </a:pPr>
+            <a:r>
+              <a:rPr sz="2600" b="1" i="0">
                 <a:solidFill>
                   <a:srgbClr val="1F4E79"/>
                 </a:solidFill>
                 <a:latin typeface="Calibri"/>
               </a:rPr>
-              <a:t>Standing</a:t>
-            </a:r>
-          </a:p>
-          <a:p>
-            <a:pPr>
-              <a:spcAft>
-                <a:spcPts val="800"/>
-              </a:spcAft>
-            </a:pPr>
-            <a:r>
-              <a:rPr sz="1700" b="0" i="0">
+              <a:t>Any content observable must clear a bound to drive a transition</a:t>
+            </a:r>
+          </a:p>
+        </p:txBody>
+      </p:sp>
+      <p:pic>
+        <p:nvPicPr>
+          <p:cNvPr id="4" name="Picture 3" descr="F6_alpha_required.png"/>
+          <p:cNvPicPr>
+            <a:picLocks noChangeAspect="1"/>
+          </p:cNvPicPr>
+          <p:nvPr/>
+        </p:nvPicPr>
+        <p:blipFill>
+          <a:blip r:embed="rId3"/>
+          <a:stretch>
+            <a:fillRect/>
+          </a:stretch>
+        </p:blipFill>
+        <p:spPr>
+          <a:xfrm>
+            <a:off x="685800" y="1463040"/>
+            <a:ext cx="4618191" cy="3154680"/>
+          </a:xfrm>
+          <a:prstGeom prst="rect">
+            <a:avLst/>
+          </a:prstGeom>
+        </p:spPr>
+      </p:pic>
+      <p:sp>
+        <p:nvSpPr>
+          <p:cNvPr id="5" name="TextBox 4"/>
+          <p:cNvSpPr txBox="1"/>
+          <p:nvPr/>
+        </p:nvSpPr>
+        <p:spPr>
+          <a:xfrm>
+            <a:off x="6720840" y="1737360"/>
+            <a:ext cx="4800600" cy="822960"/>
+          </a:xfrm>
+          <a:prstGeom prst="rect">
+            <a:avLst/>
+          </a:prstGeom>
+          <a:noFill/>
+        </p:spPr>
+        <p:txBody>
+          <a:bodyPr wrap="square" anchor="t">
+            <a:spAutoFit/>
+          </a:bodyPr>
+          <a:lstStyle/>
+          <a:p>
+            <a:pPr algn="ctr">
+              <a:spcAft>
+                <a:spcPts val="0"/>
+              </a:spcAft>
+            </a:pPr>
+            <a:r>
+              <a:rPr sz="3200" b="1">
+                <a:solidFill>
+                  <a:srgbClr val="1F4E79"/>
+                </a:solidFill>
+                <a:latin typeface="Calibri"/>
+              </a:rPr>
+              <a:t>α  ≥  h</a:t>
+            </a:r>
+            <a:r>
+              <a:rPr sz="3200" b="1" baseline="-25000">
+                <a:solidFill>
+                  <a:srgbClr val="1F4E79"/>
+                </a:solidFill>
+                <a:latin typeface="Calibri"/>
+              </a:rPr>
+              <a:t>c</a:t>
+            </a:r>
+            <a:r>
+              <a:rPr sz="3200" b="1">
+                <a:solidFill>
+                  <a:srgbClr val="1F4E79"/>
+                </a:solidFill>
+                <a:latin typeface="Calibri"/>
+              </a:rPr>
+              <a:t>(βJ) / ΔX</a:t>
+            </a:r>
+          </a:p>
+        </p:txBody>
+      </p:sp>
+      <p:sp>
+        <p:nvSpPr>
+          <p:cNvPr id="6" name="TextBox 5"/>
+          <p:cNvSpPr txBox="1"/>
+          <p:nvPr/>
+        </p:nvSpPr>
+        <p:spPr>
+          <a:xfrm>
+            <a:off x="6720840" y="2697480"/>
+            <a:ext cx="4800600" cy="1920240"/>
+          </a:xfrm>
+          <a:prstGeom prst="rect">
+            <a:avLst/>
+          </a:prstGeom>
+          <a:noFill/>
+        </p:spPr>
+        <p:txBody>
+          <a:bodyPr wrap="square" anchor="t">
+            <a:spAutoFit/>
+          </a:bodyPr>
+          <a:lstStyle/>
+          <a:p>
+            <a:pPr algn="l">
+              <a:spcAft>
+                <a:spcPts val="0"/>
+              </a:spcAft>
+            </a:pPr>
+            <a:r>
+              <a:rPr sz="1800" b="0" i="0">
+                <a:solidFill>
+                  <a:srgbClr val="1A1A1A"/>
+                </a:solidFill>
+                <a:latin typeface="Calibri"/>
+              </a:rPr>
+              <a:t>Rather than fitting α and hoping it clears zero, this states what α would have to be for the mechanism to work at all — for any candidate observable, before a corpus exists.</a:t>
+            </a:r>
+          </a:p>
+        </p:txBody>
+      </p:sp>
+      <p:sp>
+        <p:nvSpPr>
+          <p:cNvPr id="7" name="TextBox 6"/>
+          <p:cNvSpPr txBox="1"/>
+          <p:nvPr/>
+        </p:nvSpPr>
+        <p:spPr>
+          <a:xfrm>
+            <a:off x="685800" y="4892040"/>
+            <a:ext cx="10820095" cy="640080"/>
+          </a:xfrm>
+          <a:prstGeom prst="rect">
+            <a:avLst/>
+          </a:prstGeom>
+          <a:noFill/>
+        </p:spPr>
+        <p:txBody>
+          <a:bodyPr wrap="square" anchor="t">
+            <a:spAutoFit/>
+          </a:bodyPr>
+          <a:lstStyle/>
+          <a:p>
+            <a:pPr algn="ctr">
+              <a:spcAft>
+                <a:spcPts val="0"/>
+              </a:spcAft>
+            </a:pPr>
+            <a:r>
+              <a:rPr sz="1800" b="0">
+                <a:solidFill>
+                  <a:srgbClr val="1A1A1A"/>
+                </a:solidFill>
+                <a:latin typeface="Calibri"/>
+              </a:rPr>
+              <a:t>Measured spread ΔX = 0.1241  ⇒  α ≥ 0.169 at βJ = 1.10,   1.655 at 1.50,   </a:t>
+            </a:r>
+            <a:r>
+              <a:rPr sz="1800" b="1">
+                <a:solidFill>
+                  <a:srgbClr val="1F4E79"/>
+                </a:solidFill>
+                <a:latin typeface="Calibri"/>
+              </a:rPr>
+              <a:t>4.294 at 2.00</a:t>
+            </a:r>
+          </a:p>
+        </p:txBody>
+      </p:sp>
+      <p:sp>
+        <p:nvSpPr>
+          <p:cNvPr id="8" name="TextBox 7"/>
+          <p:cNvSpPr txBox="1"/>
+          <p:nvPr/>
+        </p:nvSpPr>
+        <p:spPr>
+          <a:xfrm>
+            <a:off x="685800" y="6291072"/>
+            <a:ext cx="4572000" cy="320040"/>
+          </a:xfrm>
+          <a:prstGeom prst="rect">
+            <a:avLst/>
+          </a:prstGeom>
+          <a:noFill/>
+        </p:spPr>
+        <p:txBody>
+          <a:bodyPr wrap="square" anchor="t">
+            <a:spAutoFit/>
+          </a:bodyPr>
+          <a:lstStyle/>
+          <a:p>
+            <a:pPr algn="l">
+              <a:spcAft>
+                <a:spcPts val="0"/>
+              </a:spcAft>
+            </a:pPr>
+            <a:r>
+              <a:rPr sz="1100" b="0" i="0">
                 <a:solidFill>
                   <a:srgbClr val="595959"/>
                 </a:solidFill>
                 <a:latin typeface="Calibri"/>
               </a:rPr>
-              <a:t>What holds, and what is still open.</a:t>
+              <a:t>The physics</a:t>
+            </a:r>
+          </a:p>
+        </p:txBody>
+      </p:sp>
+      <p:sp>
+        <p:nvSpPr>
+          <p:cNvPr id="9" name="TextBox 8"/>
+          <p:cNvSpPr txBox="1"/>
+          <p:nvPr/>
+        </p:nvSpPr>
+        <p:spPr>
+          <a:xfrm>
+            <a:off x="10591495" y="6291072"/>
+            <a:ext cx="914400" cy="320040"/>
+          </a:xfrm>
+          <a:prstGeom prst="rect">
+            <a:avLst/>
+          </a:prstGeom>
+          <a:noFill/>
+        </p:spPr>
+        <p:txBody>
+          <a:bodyPr wrap="square" anchor="t">
+            <a:spAutoFit/>
+          </a:bodyPr>
+          <a:lstStyle/>
+          <a:p>
+            <a:pPr algn="r">
+              <a:spcAft>
+                <a:spcPts val="0"/>
+              </a:spcAft>
+            </a:pPr>
+            <a:r>
+              <a:rPr sz="1100" b="0" i="0">
+                <a:solidFill>
+                  <a:srgbClr val="595959"/>
+                </a:solidFill>
+                <a:latin typeface="Calibri"/>
+              </a:rPr>
+              <a:t>23</a:t>
             </a:r>
           </a:p>
         </p:txBody>
@@ -8613,7 +8894,7 @@
       <p:grpSpPr/>
       <p:pic>
         <p:nvPicPr>
-          <p:cNvPr id="2" name="Picture 1" descr="target.png"/>
+          <p:cNvPr id="2" name="Picture 1" descr="flag-banner.png"/>
           <p:cNvPicPr>
             <a:picLocks noChangeAspect="1"/>
           </p:cNvPicPr>
@@ -8627,8 +8908,8 @@
         </p:blipFill>
         <p:spPr>
           <a:xfrm>
-            <a:off x="685800" y="365759"/>
-            <a:ext cx="420624" cy="420624"/>
+            <a:off x="1188720" y="2148840"/>
+            <a:ext cx="658368" cy="658368"/>
           </a:xfrm>
           <a:prstGeom prst="rect">
             <a:avLst/>
@@ -8643,8 +8924,8 @@
         </p:nvSpPr>
         <p:spPr>
           <a:xfrm>
-            <a:off x="1289304" y="310896"/>
-            <a:ext cx="10216591" cy="822960"/>
+            <a:off x="1188720" y="2971800"/>
+            <a:ext cx="8229600" cy="1828800"/>
           </a:xfrm>
           <a:prstGeom prst="rect">
             <a:avLst/>
@@ -8659,398 +8940,49 @@
           <a:p>
             <a:pPr algn="l">
               <a:spcAft>
-                <a:spcPts val="0"/>
-              </a:spcAft>
-            </a:pPr>
-            <a:r>
-              <a:rPr sz="2600" b="1" i="0">
+                <a:spcPts val="200"/>
+              </a:spcAft>
+            </a:pPr>
+            <a:r>
+              <a:rPr sz="4000" b="1" i="0">
+                <a:solidFill>
+                  <a:srgbClr val="2E75B6"/>
+                </a:solidFill>
+                <a:latin typeface="Calibri"/>
+              </a:rPr>
+              <a:t>05</a:t>
+            </a:r>
+          </a:p>
+          <a:p>
+            <a:pPr>
+              <a:spcAft>
+                <a:spcPts val="800"/>
+              </a:spcAft>
+            </a:pPr>
+            <a:r>
+              <a:rPr sz="3000" b="1" i="0">
                 <a:solidFill>
                   <a:srgbClr val="1F4E79"/>
                 </a:solidFill>
                 <a:latin typeface="Calibri"/>
               </a:rPr>
-              <a:t>Whether the encoder tracks real cortex is measurable, and one pass remains</a:t>
-            </a:r>
-          </a:p>
-        </p:txBody>
-      </p:sp>
-      <p:sp>
-        <p:nvSpPr>
-          <p:cNvPr id="4" name="TextBox 3"/>
-          <p:cNvSpPr txBox="1"/>
-          <p:nvPr/>
-        </p:nvSpPr>
-        <p:spPr>
-          <a:xfrm>
-            <a:off x="685800" y="1463040"/>
-            <a:ext cx="10820095" cy="914400"/>
-          </a:xfrm>
-          <a:prstGeom prst="rect">
-            <a:avLst/>
-          </a:prstGeom>
-          <a:noFill/>
-        </p:spPr>
-        <p:txBody>
-          <a:bodyPr wrap="square" anchor="t">
-            <a:spAutoFit/>
-          </a:bodyPr>
-          <a:lstStyle/>
-          <a:p>
-            <a:pPr algn="l">
-              <a:spcAft>
-                <a:spcPts val="0"/>
-              </a:spcAft>
-            </a:pPr>
-            <a:r>
-              <a:rPr sz="1900" b="0" i="0">
-                <a:solidFill>
-                  <a:srgbClr val="1A1A1A"/>
-                </a:solidFill>
-                <a:latin typeface="Calibri"/>
-              </a:rPr>
-              <a:t>A commercial lab reports the released checkpoint, in the averaged configuration this project runs, is anti-correlated with real cortex. Four subjects, one stimulus, not independently replicated.</a:t>
-            </a:r>
-          </a:p>
-        </p:txBody>
-      </p:sp>
-      <p:sp>
-        <p:nvSpPr>
-          <p:cNvPr id="5" name="Rounded Rectangle 4"/>
-          <p:cNvSpPr/>
-          <p:nvPr/>
-        </p:nvSpPr>
-        <p:spPr>
-          <a:xfrm>
-            <a:off x="1600200" y="2514600"/>
-            <a:ext cx="4114800" cy="1417320"/>
-          </a:xfrm>
-          <a:prstGeom prst="roundRect">
-            <a:avLst>
-              <a:gd name="adj" fmla="val 6000"/>
-            </a:avLst>
-          </a:prstGeom>
-          <a:solidFill>
-            <a:srgbClr val="FFFFFF"/>
-          </a:solidFill>
-          <a:ln w="15875">
-            <a:solidFill>
-              <a:srgbClr val="D9D9D9"/>
-            </a:solidFill>
-          </a:ln>
-          <a:effectLst/>
-        </p:spPr>
-        <p:style>
-          <a:lnRef idx="1">
-            <a:schemeClr val="accent1"/>
-          </a:lnRef>
-          <a:fillRef idx="3">
-            <a:schemeClr val="accent1"/>
-          </a:fillRef>
-          <a:effectRef idx="2">
-            <a:schemeClr val="accent1"/>
-          </a:effectRef>
-          <a:fontRef idx="minor">
-            <a:schemeClr val="lt1"/>
-          </a:fontRef>
-        </p:style>
-        <p:txBody>
-          <a:bodyPr rtlCol="0" anchor="ctr" wrap="square"/>
-          <a:lstStyle/>
-          <a:p>
-            <a:pPr algn="ctr">
-              <a:spcAft>
-                <a:spcPts val="200"/>
-              </a:spcAft>
-            </a:pPr>
-            <a:r>
-              <a:rPr sz="3000" b="1" i="0">
-                <a:solidFill>
-                  <a:srgbClr val="1F4E79"/>
-                </a:solidFill>
-                <a:latin typeface="Calibri"/>
-              </a:rPr>
-              <a:t>0.1517</a:t>
-            </a:r>
-          </a:p>
-          <a:p>
-            <a:pPr algn="ctr">
-              <a:spcAft>
-                <a:spcPts val="200"/>
-              </a:spcAft>
-            </a:pPr>
-            <a:r>
-              <a:rPr sz="1600" b="0" i="0">
-                <a:solidFill>
-                  <a:srgbClr val="1A1A1A"/>
-                </a:solidFill>
-                <a:latin typeface="Calibri"/>
-              </a:rPr>
-              <a:t>measured noise ceiling</a:t>
-            </a:r>
-          </a:p>
-          <a:p>
-            <a:pPr algn="ctr">
-              <a:spcAft>
-                <a:spcPts val="0"/>
-              </a:spcAft>
-            </a:pPr>
-            <a:r>
-              <a:rPr sz="1200" b="0" i="0">
+              <a:t>Standing</a:t>
+            </a:r>
+          </a:p>
+          <a:p>
+            <a:pPr>
+              <a:spcAft>
+                <a:spcPts val="800"/>
+              </a:spcAft>
+            </a:pPr>
+            <a:r>
+              <a:rPr sz="1700" b="0" i="0">
                 <a:solidFill>
                   <a:srgbClr val="595959"/>
                 </a:solidFill>
                 <a:latin typeface="Calibri"/>
               </a:rPr>
-              <a:t>CI [0.1484, 0.1551], 4 subjects, 1000 parcels</a:t>
-            </a:r>
-          </a:p>
-        </p:txBody>
-      </p:sp>
-      <p:sp>
-        <p:nvSpPr>
-          <p:cNvPr id="6" name="Rounded Rectangle 5"/>
-          <p:cNvSpPr/>
-          <p:nvPr/>
-        </p:nvSpPr>
-        <p:spPr>
-          <a:xfrm>
-            <a:off x="6446520" y="2514600"/>
-            <a:ext cx="4114800" cy="1417320"/>
-          </a:xfrm>
-          <a:prstGeom prst="roundRect">
-            <a:avLst>
-              <a:gd name="adj" fmla="val 6000"/>
-            </a:avLst>
-          </a:prstGeom>
-          <a:solidFill>
-            <a:srgbClr val="FFFFFF"/>
-          </a:solidFill>
-          <a:ln w="15875">
-            <a:solidFill>
-              <a:srgbClr val="D9D9D9"/>
-            </a:solidFill>
-          </a:ln>
-          <a:effectLst/>
-        </p:spPr>
-        <p:style>
-          <a:lnRef idx="1">
-            <a:schemeClr val="accent1"/>
-          </a:lnRef>
-          <a:fillRef idx="3">
-            <a:schemeClr val="accent1"/>
-          </a:fillRef>
-          <a:effectRef idx="2">
-            <a:schemeClr val="accent1"/>
-          </a:effectRef>
-          <a:fontRef idx="minor">
-            <a:schemeClr val="lt1"/>
-          </a:fontRef>
-        </p:style>
-        <p:txBody>
-          <a:bodyPr rtlCol="0" anchor="ctr" wrap="square"/>
-          <a:lstStyle/>
-          <a:p>
-            <a:pPr algn="ctr">
-              <a:spcAft>
-                <a:spcPts val="200"/>
-              </a:spcAft>
-            </a:pPr>
-            <a:r>
-              <a:rPr sz="3000" b="1" i="0">
-                <a:solidFill>
-                  <a:srgbClr val="C0392B"/>
-                </a:solidFill>
-                <a:latin typeface="Calibri"/>
-              </a:rPr>
-              <a:t>0.2247</a:t>
-            </a:r>
-          </a:p>
-          <a:p>
-            <a:pPr algn="ctr">
-              <a:spcAft>
-                <a:spcPts val="200"/>
-              </a:spcAft>
-            </a:pPr>
-            <a:r>
-              <a:rPr sz="1600" b="0" i="0">
-                <a:solidFill>
-                  <a:srgbClr val="1A1A1A"/>
-                </a:solidFill>
-                <a:latin typeface="Calibri"/>
-              </a:rPr>
-              <a:t>withdrawn</a:t>
-            </a:r>
-          </a:p>
-          <a:p>
-            <a:pPr algn="ctr">
-              <a:spcAft>
-                <a:spcPts val="0"/>
-              </a:spcAft>
-            </a:pPr>
-            <a:r>
-              <a:rPr sz="1200" b="0" i="0">
-                <a:solidFill>
-                  <a:srgbClr val="595959"/>
-                </a:solidFill>
-                <a:latin typeface="Calibri"/>
-              </a:rPr>
-              <a:t>an episode picked by position, and a guard that could not fire</a:t>
-            </a:r>
-          </a:p>
-        </p:txBody>
-      </p:sp>
-      <p:sp>
-        <p:nvSpPr>
-          <p:cNvPr id="7" name="TextBox 6"/>
-          <p:cNvSpPr txBox="1"/>
-          <p:nvPr/>
-        </p:nvSpPr>
-        <p:spPr>
-          <a:xfrm>
-            <a:off x="685800" y="4160520"/>
-            <a:ext cx="10820095" cy="914400"/>
-          </a:xfrm>
-          <a:prstGeom prst="rect">
-            <a:avLst/>
-          </a:prstGeom>
-          <a:noFill/>
-        </p:spPr>
-        <p:txBody>
-          <a:bodyPr wrap="square" anchor="t">
-            <a:spAutoFit/>
-          </a:bodyPr>
-          <a:lstStyle/>
-          <a:p>
-            <a:pPr algn="l">
-              <a:spcAft>
-                <a:spcPts val="0"/>
-              </a:spcAft>
-            </a:pPr>
-            <a:r>
-              <a:rPr sz="1900" b="0" i="0">
-                <a:solidFill>
-                  <a:srgbClr val="1A1A1A"/>
-                </a:solidFill>
-                <a:latin typeface="Calibri"/>
-              </a:rPr>
-              <a:t>Replaying the old code path reproduces the wrong number exactly, which proved the cause. Both defects were silent: nothing crashed.</a:t>
-            </a:r>
-          </a:p>
-        </p:txBody>
-      </p:sp>
-      <p:sp>
-        <p:nvSpPr>
-          <p:cNvPr id="8" name="TextBox 7"/>
-          <p:cNvSpPr txBox="1"/>
-          <p:nvPr/>
-        </p:nvSpPr>
-        <p:spPr>
-          <a:xfrm>
-            <a:off x="685800" y="5897880"/>
-            <a:ext cx="10820095" cy="384048"/>
-          </a:xfrm>
-          <a:prstGeom prst="rect">
-            <a:avLst/>
-          </a:prstGeom>
-          <a:noFill/>
-        </p:spPr>
-        <p:txBody>
-          <a:bodyPr wrap="square" anchor="t">
-            <a:spAutoFit/>
-          </a:bodyPr>
-          <a:lstStyle/>
-          <a:p>
-            <a:pPr algn="l">
-              <a:spcAft>
-                <a:spcPts val="0"/>
-              </a:spcAft>
-            </a:pPr>
-            <a:r>
-              <a:rPr sz="1100" b="0" i="0">
-                <a:solidFill>
-                  <a:srgbClr val="595959"/>
-                </a:solidFill>
-                <a:latin typeface="Calibri"/>
-              </a:rPr>
-              <a:t>Schaefer et al. (2018); Algonauts 2025 (CC0); audit self-published, Sapient (2026).</a:t>
-            </a:r>
-          </a:p>
-        </p:txBody>
-      </p:sp>
-      <p:sp>
-        <p:nvSpPr>
-          <p:cNvPr id="9" name="TextBox 8"/>
-          <p:cNvSpPr txBox="1"/>
-          <p:nvPr/>
-        </p:nvSpPr>
-        <p:spPr>
-          <a:xfrm>
-            <a:off x="685800" y="6291072"/>
-            <a:ext cx="4572000" cy="320040"/>
-          </a:xfrm>
-          <a:prstGeom prst="rect">
-            <a:avLst/>
-          </a:prstGeom>
-          <a:noFill/>
-        </p:spPr>
-        <p:txBody>
-          <a:bodyPr wrap="square" anchor="t">
-            <a:spAutoFit/>
-          </a:bodyPr>
-          <a:lstStyle/>
-          <a:p>
-            <a:pPr algn="l">
-              <a:spcAft>
-                <a:spcPts val="0"/>
-              </a:spcAft>
-            </a:pPr>
-            <a:r>
-              <a:rPr sz="1100" b="0" i="0">
-                <a:solidFill>
-                  <a:srgbClr val="595959"/>
-                </a:solidFill>
-                <a:latin typeface="Calibri"/>
-              </a:rPr>
-              <a:t>Standing</a:t>
-            </a:r>
-          </a:p>
-        </p:txBody>
-      </p:sp>
-      <p:sp>
-        <p:nvSpPr>
-          <p:cNvPr id="10" name="TextBox 9"/>
-          <p:cNvSpPr txBox="1"/>
-          <p:nvPr/>
-        </p:nvSpPr>
-        <p:spPr>
-          <a:xfrm>
-            <a:off x="10591495" y="6291072"/>
-            <a:ext cx="914400" cy="320040"/>
-          </a:xfrm>
-          <a:prstGeom prst="rect">
-            <a:avLst/>
-          </a:prstGeom>
-          <a:noFill/>
-        </p:spPr>
-        <p:txBody>
-          <a:bodyPr wrap="square" anchor="t">
-            <a:spAutoFit/>
-          </a:bodyPr>
-          <a:lstStyle/>
-          <a:p>
-            <a:pPr algn="r">
-              <a:spcAft>
-                <a:spcPts val="0"/>
-              </a:spcAft>
-            </a:pPr>
-            <a:r>
-              <a:rPr sz="1100" b="0" i="0">
-                <a:solidFill>
-                  <a:srgbClr val="595959"/>
-                </a:solidFill>
-                <a:latin typeface="Calibri"/>
-              </a:rPr>
-              <a:t>24</a:t>
+              <a:t>What holds, and what is still open.</a:t>
             </a:r>
           </a:p>
         </p:txBody>
@@ -9075,7 +9007,7 @@
       <p:grpSpPr/>
       <p:pic>
         <p:nvPicPr>
-          <p:cNvPr id="2" name="Picture 1" descr="check-circle.png"/>
+          <p:cNvPr id="2" name="Picture 1" descr="target.png"/>
           <p:cNvPicPr>
             <a:picLocks noChangeAspect="1"/>
           </p:cNvPicPr>
@@ -9131,45 +9063,21 @@
                 </a:solidFill>
                 <a:latin typeface="Calibri"/>
               </a:rPr>
-              <a:t>Four claims the work supports, and four it does not</a:t>
-            </a:r>
-          </a:p>
-        </p:txBody>
-      </p:sp>
-      <p:pic>
-        <p:nvPicPr>
-          <p:cNvPr id="4" name="Picture 3" descr="check-circle.png"/>
-          <p:cNvPicPr>
-            <a:picLocks noChangeAspect="1"/>
-          </p:cNvPicPr>
-          <p:nvPr/>
-        </p:nvPicPr>
-        <p:blipFill>
-          <a:blip r:embed="rId2"/>
-          <a:stretch>
-            <a:fillRect/>
-          </a:stretch>
-        </p:blipFill>
-        <p:spPr>
-          <a:xfrm>
-            <a:off x="685800" y="1417320"/>
-            <a:ext cx="310896" cy="310896"/>
-          </a:xfrm>
-          <a:prstGeom prst="rect">
-            <a:avLst/>
-          </a:prstGeom>
-        </p:spPr>
-      </p:pic>
-      <p:sp>
-        <p:nvSpPr>
-          <p:cNvPr id="5" name="TextBox 4"/>
-          <p:cNvSpPr txBox="1"/>
-          <p:nvPr/>
-        </p:nvSpPr>
-        <p:spPr>
-          <a:xfrm>
-            <a:off x="1124712" y="1371600"/>
-            <a:ext cx="4572000" cy="411480"/>
+              <a:t>Whether the encoder tracks real cortex is measurable, and one pass remains</a:t>
+            </a:r>
+          </a:p>
+        </p:txBody>
+      </p:sp>
+      <p:sp>
+        <p:nvSpPr>
+          <p:cNvPr id="4" name="TextBox 3"/>
+          <p:cNvSpPr txBox="1"/>
+          <p:nvPr/>
+        </p:nvSpPr>
+        <p:spPr>
+          <a:xfrm>
+            <a:off x="685800" y="1463040"/>
+            <a:ext cx="10820095" cy="914400"/>
           </a:xfrm>
           <a:prstGeom prst="rect">
             <a:avLst/>
@@ -9188,27 +9096,213 @@
               </a:spcAft>
             </a:pPr>
             <a:r>
-              <a:rPr sz="1700" b="1" i="0">
+              <a:rPr sz="1900" b="0" i="0">
+                <a:solidFill>
+                  <a:srgbClr val="1A1A1A"/>
+                </a:solidFill>
+                <a:latin typeface="Calibri"/>
+              </a:rPr>
+              <a:t>A commercial lab reports the released checkpoint, in the averaged configuration this project runs, is anti-correlated with real cortex. Four subjects, one stimulus, not independently replicated.</a:t>
+            </a:r>
+          </a:p>
+        </p:txBody>
+      </p:sp>
+      <p:sp>
+        <p:nvSpPr>
+          <p:cNvPr id="5" name="Rounded Rectangle 4"/>
+          <p:cNvSpPr/>
+          <p:nvPr/>
+        </p:nvSpPr>
+        <p:spPr>
+          <a:xfrm>
+            <a:off x="1600200" y="2514600"/>
+            <a:ext cx="4114800" cy="1417320"/>
+          </a:xfrm>
+          <a:prstGeom prst="roundRect">
+            <a:avLst>
+              <a:gd name="adj" fmla="val 6000"/>
+            </a:avLst>
+          </a:prstGeom>
+          <a:solidFill>
+            <a:srgbClr val="FFFFFF"/>
+          </a:solidFill>
+          <a:ln w="15875">
+            <a:solidFill>
+              <a:srgbClr val="D9D9D9"/>
+            </a:solidFill>
+          </a:ln>
+          <a:effectLst/>
+        </p:spPr>
+        <p:style>
+          <a:lnRef idx="1">
+            <a:schemeClr val="accent1"/>
+          </a:lnRef>
+          <a:fillRef idx="3">
+            <a:schemeClr val="accent1"/>
+          </a:fillRef>
+          <a:effectRef idx="2">
+            <a:schemeClr val="accent1"/>
+          </a:effectRef>
+          <a:fontRef idx="minor">
+            <a:schemeClr val="lt1"/>
+          </a:fontRef>
+        </p:style>
+        <p:txBody>
+          <a:bodyPr rtlCol="0" anchor="ctr" wrap="square"/>
+          <a:lstStyle/>
+          <a:p>
+            <a:pPr algn="ctr">
+              <a:spcAft>
+                <a:spcPts val="200"/>
+              </a:spcAft>
+            </a:pPr>
+            <a:r>
+              <a:rPr sz="3000" b="1" i="0">
                 <a:solidFill>
                   <a:srgbClr val="1F4E79"/>
                 </a:solidFill>
                 <a:latin typeface="Calibri"/>
               </a:rPr>
-              <a:t>SUPPORTED</a:t>
-            </a:r>
-          </a:p>
-        </p:txBody>
-      </p:sp>
-      <p:sp>
-        <p:nvSpPr>
-          <p:cNvPr id="6" name="TextBox 5"/>
-          <p:cNvSpPr txBox="1"/>
-          <p:nvPr/>
-        </p:nvSpPr>
-        <p:spPr>
-          <a:xfrm>
-            <a:off x="685800" y="1920240"/>
-            <a:ext cx="5120640" cy="3291840"/>
+              <a:t>0.1517</a:t>
+            </a:r>
+          </a:p>
+          <a:p>
+            <a:pPr algn="ctr">
+              <a:spcAft>
+                <a:spcPts val="200"/>
+              </a:spcAft>
+            </a:pPr>
+            <a:r>
+              <a:rPr sz="1600" b="0" i="0">
+                <a:solidFill>
+                  <a:srgbClr val="1A1A1A"/>
+                </a:solidFill>
+                <a:latin typeface="Calibri"/>
+              </a:rPr>
+              <a:t>measured noise ceiling</a:t>
+            </a:r>
+          </a:p>
+          <a:p>
+            <a:pPr algn="ctr">
+              <a:spcAft>
+                <a:spcPts val="0"/>
+              </a:spcAft>
+            </a:pPr>
+            <a:r>
+              <a:rPr sz="1200" b="0" i="0">
+                <a:solidFill>
+                  <a:srgbClr val="595959"/>
+                </a:solidFill>
+                <a:latin typeface="Calibri"/>
+              </a:rPr>
+              <a:t>CI [0.1484, 0.1551], 4 subjects, 1000 parcels</a:t>
+            </a:r>
+          </a:p>
+        </p:txBody>
+      </p:sp>
+      <p:sp>
+        <p:nvSpPr>
+          <p:cNvPr id="6" name="Rounded Rectangle 5"/>
+          <p:cNvSpPr/>
+          <p:nvPr/>
+        </p:nvSpPr>
+        <p:spPr>
+          <a:xfrm>
+            <a:off x="6446520" y="2514600"/>
+            <a:ext cx="4114800" cy="1417320"/>
+          </a:xfrm>
+          <a:prstGeom prst="roundRect">
+            <a:avLst>
+              <a:gd name="adj" fmla="val 6000"/>
+            </a:avLst>
+          </a:prstGeom>
+          <a:solidFill>
+            <a:srgbClr val="FFFFFF"/>
+          </a:solidFill>
+          <a:ln w="15875">
+            <a:solidFill>
+              <a:srgbClr val="D9D9D9"/>
+            </a:solidFill>
+          </a:ln>
+          <a:effectLst/>
+        </p:spPr>
+        <p:style>
+          <a:lnRef idx="1">
+            <a:schemeClr val="accent1"/>
+          </a:lnRef>
+          <a:fillRef idx="3">
+            <a:schemeClr val="accent1"/>
+          </a:fillRef>
+          <a:effectRef idx="2">
+            <a:schemeClr val="accent1"/>
+          </a:effectRef>
+          <a:fontRef idx="minor">
+            <a:schemeClr val="lt1"/>
+          </a:fontRef>
+        </p:style>
+        <p:txBody>
+          <a:bodyPr rtlCol="0" anchor="ctr" wrap="square"/>
+          <a:lstStyle/>
+          <a:p>
+            <a:pPr algn="ctr">
+              <a:spcAft>
+                <a:spcPts val="200"/>
+              </a:spcAft>
+            </a:pPr>
+            <a:r>
+              <a:rPr sz="3000" b="1" i="0">
+                <a:solidFill>
+                  <a:srgbClr val="C0392B"/>
+                </a:solidFill>
+                <a:latin typeface="Calibri"/>
+              </a:rPr>
+              <a:t>0.2247</a:t>
+            </a:r>
+          </a:p>
+          <a:p>
+            <a:pPr algn="ctr">
+              <a:spcAft>
+                <a:spcPts val="200"/>
+              </a:spcAft>
+            </a:pPr>
+            <a:r>
+              <a:rPr sz="1600" b="0" i="0">
+                <a:solidFill>
+                  <a:srgbClr val="1A1A1A"/>
+                </a:solidFill>
+                <a:latin typeface="Calibri"/>
+              </a:rPr>
+              <a:t>withdrawn</a:t>
+            </a:r>
+          </a:p>
+          <a:p>
+            <a:pPr algn="ctr">
+              <a:spcAft>
+                <a:spcPts val="0"/>
+              </a:spcAft>
+            </a:pPr>
+            <a:r>
+              <a:rPr sz="1200" b="0" i="0">
+                <a:solidFill>
+                  <a:srgbClr val="595959"/>
+                </a:solidFill>
+                <a:latin typeface="Calibri"/>
+              </a:rPr>
+              <a:t>an episode picked by position, and a guard that could not fire</a:t>
+            </a:r>
+          </a:p>
+        </p:txBody>
+      </p:sp>
+      <p:sp>
+        <p:nvSpPr>
+          <p:cNvPr id="7" name="TextBox 6"/>
+          <p:cNvSpPr txBox="1"/>
+          <p:nvPr/>
+        </p:nvSpPr>
+        <p:spPr>
+          <a:xfrm>
+            <a:off x="685800" y="4160520"/>
+            <a:ext cx="10820095" cy="914400"/>
           </a:xfrm>
           <a:prstGeom prst="rect">
             <a:avLst/>
@@ -9223,93 +9317,21 @@
           <a:p>
             <a:pPr algn="l">
               <a:spcAft>
-                <a:spcPts val="1200"/>
-              </a:spcAft>
-            </a:pPr>
-            <a:r>
-              <a:rPr sz="1700" b="0" i="0">
+                <a:spcPts val="0"/>
+              </a:spcAft>
+            </a:pPr>
+            <a:r>
+              <a:rPr sz="1900" b="0" i="0">
                 <a:solidFill>
                   <a:srgbClr val="1A1A1A"/>
                 </a:solidFill>
                 <a:latin typeface="Calibri"/>
               </a:rPr>
-              <a:t>•  A content observable that can be measured, with its reliability stated.</a:t>
-            </a:r>
-          </a:p>
-          <a:p>
-            <a:pPr>
-              <a:spcAft>
-                <a:spcPts val="1200"/>
-              </a:spcAft>
-            </a:pPr>
-            <a:r>
-              <a:rPr sz="1700" b="0" i="0">
-                <a:solidFill>
-                  <a:srgbClr val="1A1A1A"/>
-                </a:solidFill>
-                <a:latin typeface="Calibri"/>
-              </a:rPr>
-              <a:t>•  That it separates these four corpora at 0.1068, power attached.</a:t>
-            </a:r>
-          </a:p>
-          <a:p>
-            <a:pPr>
-              <a:spcAft>
-                <a:spcPts val="1200"/>
-              </a:spcAft>
-            </a:pPr>
-            <a:r>
-              <a:rPr sz="1700" b="0" i="0">
-                <a:solidFill>
-                  <a:srgbClr val="1A1A1A"/>
-                </a:solidFill>
-                <a:latin typeface="Calibri"/>
-              </a:rPr>
-              <a:t>•  A bound any candidate observable must satisfy, usable before data exists.</a:t>
-            </a:r>
-          </a:p>
-          <a:p>
-            <a:pPr>
-              <a:spcAft>
-                <a:spcPts val="1200"/>
-              </a:spcAft>
-            </a:pPr>
-            <a:r>
-              <a:rPr sz="1700" b="0" i="0">
-                <a:solidFill>
-                  <a:srgbClr val="1A1A1A"/>
-                </a:solidFill>
-                <a:latin typeface="Calibri"/>
-              </a:rPr>
-              <a:t>•  A measured noise ceiling for the checkpoint on public data.</a:t>
-            </a:r>
-          </a:p>
-        </p:txBody>
-      </p:sp>
-      <p:pic>
-        <p:nvPicPr>
-          <p:cNvPr id="7" name="Picture 6" descr="x-circle.png"/>
-          <p:cNvPicPr>
-            <a:picLocks noChangeAspect="1"/>
-          </p:cNvPicPr>
-          <p:nvPr/>
-        </p:nvPicPr>
-        <p:blipFill>
-          <a:blip r:embed="rId3"/>
-          <a:stretch>
-            <a:fillRect/>
-          </a:stretch>
-        </p:blipFill>
-        <p:spPr>
-          <a:xfrm>
-            <a:off x="6492240" y="1417320"/>
-            <a:ext cx="310896" cy="310896"/>
-          </a:xfrm>
-          <a:prstGeom prst="rect">
-            <a:avLst/>
-          </a:prstGeom>
-        </p:spPr>
-      </p:pic>
+              <a:t>Replaying the old code path reproduces the wrong number exactly, which proved the cause. Both defects were silent: nothing crashed.</a:t>
+            </a:r>
+          </a:p>
+        </p:txBody>
+      </p:sp>
       <p:sp>
         <p:nvSpPr>
           <p:cNvPr id="8" name="TextBox 7"/>
@@ -9318,8 +9340,8 @@
         </p:nvSpPr>
         <p:spPr>
           <a:xfrm>
-            <a:off x="6931152" y="1371600"/>
-            <a:ext cx="4572000" cy="411480"/>
+            <a:off x="685800" y="5897880"/>
+            <a:ext cx="10820095" cy="384048"/>
           </a:xfrm>
           <a:prstGeom prst="rect">
             <a:avLst/>
@@ -9338,13 +9360,13 @@
               </a:spcAft>
             </a:pPr>
             <a:r>
-              <a:rPr sz="1700" b="1" i="0">
-                <a:solidFill>
-                  <a:srgbClr val="C0392B"/>
-                </a:solidFill>
-                <a:latin typeface="Calibri"/>
-              </a:rPr>
-              <a:t>NOT SUPPORTED</a:t>
+              <a:rPr sz="1100" b="0" i="0">
+                <a:solidFill>
+                  <a:srgbClr val="595959"/>
+                </a:solidFill>
+                <a:latin typeface="Calibri"/>
+              </a:rPr>
+              <a:t>Schaefer et al. (2018); Algonauts 2025 (CC0); audit self-published, Sapient (2026).</a:t>
             </a:r>
           </a:p>
         </p:txBody>
@@ -9352,93 +9374,6 @@
       <p:sp>
         <p:nvSpPr>
           <p:cNvPr id="9" name="TextBox 8"/>
-          <p:cNvSpPr txBox="1"/>
-          <p:nvPr/>
-        </p:nvSpPr>
-        <p:spPr>
-          <a:xfrm>
-            <a:off x="6492240" y="1920240"/>
-            <a:ext cx="5029200" cy="3291840"/>
-          </a:xfrm>
-          <a:prstGeom prst="rect">
-            <a:avLst/>
-          </a:prstGeom>
-          <a:noFill/>
-        </p:spPr>
-        <p:txBody>
-          <a:bodyPr wrap="square" anchor="t">
-            <a:spAutoFit/>
-          </a:bodyPr>
-          <a:lstStyle/>
-          <a:p>
-            <a:pPr algn="l">
-              <a:spcAft>
-                <a:spcPts val="1200"/>
-              </a:spcAft>
-            </a:pPr>
-            <a:r>
-              <a:rPr sz="1700" b="0" i="0">
-                <a:solidFill>
-                  <a:srgbClr val="1A1A1A"/>
-                </a:solidFill>
-                <a:latin typeface="Calibri"/>
-              </a:rPr>
-              <a:t>•  That the index detects manipulation. Category is confounded with source.</a:t>
-            </a:r>
-          </a:p>
-          <a:p>
-            <a:pPr>
-              <a:spcAft>
-                <a:spcPts val="1200"/>
-              </a:spcAft>
-            </a:pPr>
-            <a:r>
-              <a:rPr sz="1700" b="0" i="0">
-                <a:solidFill>
-                  <a:srgbClr val="1A1A1A"/>
-                </a:solidFill>
-                <a:latin typeface="Calibri"/>
-              </a:rPr>
-              <a:t>•  Anything about the amygdala. The checkpoint does not predict it.</a:t>
-            </a:r>
-          </a:p>
-          <a:p>
-            <a:pPr>
-              <a:spcAft>
-                <a:spcPts val="1200"/>
-              </a:spcAft>
-            </a:pPr>
-            <a:r>
-              <a:rPr sz="1700" b="0" i="0">
-                <a:solidFill>
-                  <a:srgbClr val="1A1A1A"/>
-                </a:solidFill>
-                <a:latin typeface="Calibri"/>
-              </a:rPr>
-              <a:t>•  Any value of the coupling α. The corpus does not identify it.</a:t>
-            </a:r>
-          </a:p>
-          <a:p>
-            <a:pPr>
-              <a:spcAft>
-                <a:spcPts val="1200"/>
-              </a:spcAft>
-            </a:pPr>
-            <a:r>
-              <a:rPr sz="1700" b="0" i="0">
-                <a:solidFill>
-                  <a:srgbClr val="1A1A1A"/>
-                </a:solidFill>
-                <a:latin typeface="Calibri"/>
-              </a:rPr>
-              <a:t>•  Any verdict on one article. 12.8% reverse between sessions.</a:t>
-            </a:r>
-          </a:p>
-        </p:txBody>
-      </p:sp>
-      <p:sp>
-        <p:nvSpPr>
-          <p:cNvPr id="10" name="TextBox 9"/>
           <p:cNvSpPr txBox="1"/>
           <p:nvPr/>
         </p:nvSpPr>
@@ -9477,7 +9412,7 @@
       </p:sp>
       <p:sp>
         <p:nvSpPr>
-          <p:cNvPr id="11" name="TextBox 10"/>
+          <p:cNvPr id="10" name="TextBox 9"/>
           <p:cNvSpPr txBox="1"/>
           <p:nvPr/>
         </p:nvSpPr>
@@ -9534,7 +9469,7 @@
       <p:grpSpPr/>
       <p:pic>
         <p:nvPicPr>
-          <p:cNvPr id="2" name="Picture 1" descr="books.png"/>
+          <p:cNvPr id="2" name="Picture 1" descr="check-circle.png"/>
           <p:cNvPicPr>
             <a:picLocks noChangeAspect="1"/>
           </p:cNvPicPr>
@@ -9590,21 +9525,45 @@
                 </a:solidFill>
                 <a:latin typeface="Calibri"/>
               </a:rPr>
-              <a:t>The work yields a dissertation and three papers</a:t>
-            </a:r>
-          </a:p>
-        </p:txBody>
-      </p:sp>
-      <p:sp>
-        <p:nvSpPr>
-          <p:cNvPr id="4" name="TextBox 3"/>
-          <p:cNvSpPr txBox="1"/>
-          <p:nvPr/>
-        </p:nvSpPr>
-        <p:spPr>
-          <a:xfrm>
-            <a:off x="685800" y="1554480"/>
-            <a:ext cx="2606040" cy="2743200"/>
+              <a:t>Four claims the work supports, and four it does not</a:t>
+            </a:r>
+          </a:p>
+        </p:txBody>
+      </p:sp>
+      <p:pic>
+        <p:nvPicPr>
+          <p:cNvPr id="4" name="Picture 3" descr="check-circle.png"/>
+          <p:cNvPicPr>
+            <a:picLocks noChangeAspect="1"/>
+          </p:cNvPicPr>
+          <p:nvPr/>
+        </p:nvPicPr>
+        <p:blipFill>
+          <a:blip r:embed="rId2"/>
+          <a:stretch>
+            <a:fillRect/>
+          </a:stretch>
+        </p:blipFill>
+        <p:spPr>
+          <a:xfrm>
+            <a:off x="685800" y="1417320"/>
+            <a:ext cx="310896" cy="310896"/>
+          </a:xfrm>
+          <a:prstGeom prst="rect">
+            <a:avLst/>
+          </a:prstGeom>
+        </p:spPr>
+      </p:pic>
+      <p:sp>
+        <p:nvSpPr>
+          <p:cNvPr id="5" name="TextBox 4"/>
+          <p:cNvSpPr txBox="1"/>
+          <p:nvPr/>
+        </p:nvSpPr>
+        <p:spPr>
+          <a:xfrm>
+            <a:off x="1124712" y="1371600"/>
+            <a:ext cx="4572000" cy="411480"/>
           </a:xfrm>
           <a:prstGeom prst="rect">
             <a:avLst/>
@@ -9619,63 +9578,142 @@
           <a:p>
             <a:pPr algn="l">
               <a:spcAft>
-                <a:spcPts val="400"/>
-              </a:spcAft>
-            </a:pPr>
-            <a:r>
-              <a:rPr sz="2200" b="1" i="0">
-                <a:solidFill>
-                  <a:srgbClr val="2E75B6"/>
-                </a:solidFill>
-                <a:latin typeface="Calibri"/>
-              </a:rPr>
-              <a:t>72 pp</a:t>
+                <a:spcPts val="0"/>
+              </a:spcAft>
+            </a:pPr>
+            <a:r>
+              <a:rPr sz="1700" b="1" i="0">
+                <a:solidFill>
+                  <a:srgbClr val="1F4E79"/>
+                </a:solidFill>
+                <a:latin typeface="Calibri"/>
+              </a:rPr>
+              <a:t>SUPPORTED</a:t>
+            </a:r>
+          </a:p>
+        </p:txBody>
+      </p:sp>
+      <p:sp>
+        <p:nvSpPr>
+          <p:cNvPr id="6" name="TextBox 5"/>
+          <p:cNvSpPr txBox="1"/>
+          <p:nvPr/>
+        </p:nvSpPr>
+        <p:spPr>
+          <a:xfrm>
+            <a:off x="685800" y="1920240"/>
+            <a:ext cx="5120640" cy="3291840"/>
+          </a:xfrm>
+          <a:prstGeom prst="rect">
+            <a:avLst/>
+          </a:prstGeom>
+          <a:noFill/>
+        </p:spPr>
+        <p:txBody>
+          <a:bodyPr wrap="square" anchor="t">
+            <a:spAutoFit/>
+          </a:bodyPr>
+          <a:lstStyle/>
+          <a:p>
+            <a:pPr algn="l">
+              <a:spcAft>
+                <a:spcPts val="1200"/>
+              </a:spcAft>
+            </a:pPr>
+            <a:r>
+              <a:rPr sz="1700" b="0" i="0">
+                <a:solidFill>
+                  <a:srgbClr val="1A1A1A"/>
+                </a:solidFill>
+                <a:latin typeface="Calibri"/>
+              </a:rPr>
+              <a:t>•  A content observable that can be measured, with its reliability stated.</a:t>
             </a:r>
           </a:p>
           <a:p>
             <a:pPr>
               <a:spcAft>
-                <a:spcPts val="800"/>
-              </a:spcAft>
-            </a:pPr>
-            <a:r>
-              <a:rPr sz="2000" b="1" i="0">
+                <a:spcPts val="1200"/>
+              </a:spcAft>
+            </a:pPr>
+            <a:r>
+              <a:rPr sz="1700" b="0" i="0">
                 <a:solidFill>
                   <a:srgbClr val="1A1A1A"/>
                 </a:solidFill>
                 <a:latin typeface="Calibri"/>
               </a:rPr>
-              <a:t>Dissertation</a:t>
+              <a:t>•  That it separates these four corpora at 0.1068, power attached.</a:t>
             </a:r>
           </a:p>
           <a:p>
             <a:pPr>
               <a:spcAft>
-                <a:spcPts val="0"/>
-              </a:spcAft>
-            </a:pPr>
-            <a:r>
-              <a:rPr sz="1500" b="0" i="0">
-                <a:solidFill>
-                  <a:srgbClr val="595959"/>
-                </a:solidFill>
-                <a:latin typeface="Calibri"/>
-              </a:rPr>
-              <a:t>Complete draft.</a:t>
-            </a:r>
-          </a:p>
-        </p:txBody>
-      </p:sp>
-      <p:sp>
-        <p:nvSpPr>
-          <p:cNvPr id="5" name="TextBox 4"/>
-          <p:cNvSpPr txBox="1"/>
-          <p:nvPr/>
-        </p:nvSpPr>
-        <p:spPr>
-          <a:xfrm>
-            <a:off x="3584448" y="1554480"/>
-            <a:ext cx="2606040" cy="2743200"/>
+                <a:spcPts val="1200"/>
+              </a:spcAft>
+            </a:pPr>
+            <a:r>
+              <a:rPr sz="1700" b="0" i="0">
+                <a:solidFill>
+                  <a:srgbClr val="1A1A1A"/>
+                </a:solidFill>
+                <a:latin typeface="Calibri"/>
+              </a:rPr>
+              <a:t>•  A bound any candidate observable must satisfy, usable before data exists.</a:t>
+            </a:r>
+          </a:p>
+          <a:p>
+            <a:pPr>
+              <a:spcAft>
+                <a:spcPts val="1200"/>
+              </a:spcAft>
+            </a:pPr>
+            <a:r>
+              <a:rPr sz="1700" b="0" i="0">
+                <a:solidFill>
+                  <a:srgbClr val="1A1A1A"/>
+                </a:solidFill>
+                <a:latin typeface="Calibri"/>
+              </a:rPr>
+              <a:t>•  A measured noise ceiling for the checkpoint on public data.</a:t>
+            </a:r>
+          </a:p>
+        </p:txBody>
+      </p:sp>
+      <p:pic>
+        <p:nvPicPr>
+          <p:cNvPr id="7" name="Picture 6" descr="x-circle.png"/>
+          <p:cNvPicPr>
+            <a:picLocks noChangeAspect="1"/>
+          </p:cNvPicPr>
+          <p:nvPr/>
+        </p:nvPicPr>
+        <p:blipFill>
+          <a:blip r:embed="rId3"/>
+          <a:stretch>
+            <a:fillRect/>
+          </a:stretch>
+        </p:blipFill>
+        <p:spPr>
+          <a:xfrm>
+            <a:off x="6492240" y="1417320"/>
+            <a:ext cx="310896" cy="310896"/>
+          </a:xfrm>
+          <a:prstGeom prst="rect">
+            <a:avLst/>
+          </a:prstGeom>
+        </p:spPr>
+      </p:pic>
+      <p:sp>
+        <p:nvSpPr>
+          <p:cNvPr id="8" name="TextBox 7"/>
+          <p:cNvSpPr txBox="1"/>
+          <p:nvPr/>
+        </p:nvSpPr>
+        <p:spPr>
+          <a:xfrm>
+            <a:off x="6931152" y="1371600"/>
+            <a:ext cx="4572000" cy="411480"/>
           </a:xfrm>
           <a:prstGeom prst="rect">
             <a:avLst/>
@@ -9690,274 +9728,104 @@
           <a:p>
             <a:pPr algn="l">
               <a:spcAft>
-                <a:spcPts val="400"/>
-              </a:spcAft>
-            </a:pPr>
-            <a:r>
-              <a:rPr sz="2200" b="1" i="0">
-                <a:solidFill>
-                  <a:srgbClr val="2E75B6"/>
-                </a:solidFill>
-                <a:latin typeface="Calibri"/>
-              </a:rPr>
-              <a:t>12 pp</a:t>
+                <a:spcPts val="0"/>
+              </a:spcAft>
+            </a:pPr>
+            <a:r>
+              <a:rPr sz="1700" b="1" i="0">
+                <a:solidFill>
+                  <a:srgbClr val="C0392B"/>
+                </a:solidFill>
+                <a:latin typeface="Calibri"/>
+              </a:rPr>
+              <a:t>NOT SUPPORTED</a:t>
+            </a:r>
+          </a:p>
+        </p:txBody>
+      </p:sp>
+      <p:sp>
+        <p:nvSpPr>
+          <p:cNvPr id="9" name="TextBox 8"/>
+          <p:cNvSpPr txBox="1"/>
+          <p:nvPr/>
+        </p:nvSpPr>
+        <p:spPr>
+          <a:xfrm>
+            <a:off x="6492240" y="1920240"/>
+            <a:ext cx="5029200" cy="3291840"/>
+          </a:xfrm>
+          <a:prstGeom prst="rect">
+            <a:avLst/>
+          </a:prstGeom>
+          <a:noFill/>
+        </p:spPr>
+        <p:txBody>
+          <a:bodyPr wrap="square" anchor="t">
+            <a:spAutoFit/>
+          </a:bodyPr>
+          <a:lstStyle/>
+          <a:p>
+            <a:pPr algn="l">
+              <a:spcAft>
+                <a:spcPts val="1200"/>
+              </a:spcAft>
+            </a:pPr>
+            <a:r>
+              <a:rPr sz="1700" b="0" i="0">
+                <a:solidFill>
+                  <a:srgbClr val="1A1A1A"/>
+                </a:solidFill>
+                <a:latin typeface="Calibri"/>
+              </a:rPr>
+              <a:t>•  That the index detects manipulation. Source is confounded; TF-IDF scores 0.9758.</a:t>
             </a:r>
           </a:p>
           <a:p>
             <a:pPr>
               <a:spcAft>
-                <a:spcPts val="800"/>
-              </a:spcAft>
-            </a:pPr>
-            <a:r>
-              <a:rPr sz="2000" b="1" i="0">
+                <a:spcPts val="1200"/>
+              </a:spcAft>
+            </a:pPr>
+            <a:r>
+              <a:rPr sz="1700" b="0" i="0">
                 <a:solidFill>
                   <a:srgbClr val="1A1A1A"/>
                 </a:solidFill>
                 <a:latin typeface="Calibri"/>
               </a:rPr>
-              <a:t>Paper 1</a:t>
+              <a:t>•  Anything about the amygdala. The checkpoint does not predict it.</a:t>
             </a:r>
           </a:p>
           <a:p>
             <a:pPr>
               <a:spcAft>
-                <a:spcPts val="0"/>
-              </a:spcAft>
-            </a:pPr>
-            <a:r>
-              <a:rPr sz="1500" b="0" i="0">
-                <a:solidFill>
-                  <a:srgbClr val="595959"/>
-                </a:solidFill>
-                <a:latin typeface="Calibri"/>
-              </a:rPr>
-              <a:t>The bound and the screening criterion. Physica A. Independent of the scan.</a:t>
-            </a:r>
-          </a:p>
-        </p:txBody>
-      </p:sp>
-      <p:sp>
-        <p:nvSpPr>
-          <p:cNvPr id="6" name="TextBox 5"/>
-          <p:cNvSpPr txBox="1"/>
-          <p:nvPr/>
-        </p:nvSpPr>
-        <p:spPr>
-          <a:xfrm>
-            <a:off x="6483096" y="1554480"/>
-            <a:ext cx="2606040" cy="2743200"/>
-          </a:xfrm>
-          <a:prstGeom prst="rect">
-            <a:avLst/>
-          </a:prstGeom>
-          <a:noFill/>
-        </p:spPr>
-        <p:txBody>
-          <a:bodyPr wrap="square" anchor="t">
-            <a:spAutoFit/>
-          </a:bodyPr>
-          <a:lstStyle/>
-          <a:p>
-            <a:pPr algn="l">
-              <a:spcAft>
-                <a:spcPts val="400"/>
-              </a:spcAft>
-            </a:pPr>
-            <a:r>
-              <a:rPr sz="2200" b="1" i="0">
-                <a:solidFill>
-                  <a:srgbClr val="2E75B6"/>
-                </a:solidFill>
-                <a:latin typeface="Calibri"/>
-              </a:rPr>
-              <a:t>12 pp</a:t>
+                <a:spcPts val="1200"/>
+              </a:spcAft>
+            </a:pPr>
+            <a:r>
+              <a:rPr sz="1700" b="0" i="0">
+                <a:solidFill>
+                  <a:srgbClr val="1A1A1A"/>
+                </a:solidFill>
+                <a:latin typeface="Calibri"/>
+              </a:rPr>
+              <a:t>•  Any value of the coupling α. The corpus does not identify it.</a:t>
             </a:r>
           </a:p>
           <a:p>
             <a:pPr>
               <a:spcAft>
-                <a:spcPts val="800"/>
-              </a:spcAft>
-            </a:pPr>
-            <a:r>
-              <a:rPr sz="2000" b="1" i="0">
+                <a:spcPts val="1200"/>
+              </a:spcAft>
+            </a:pPr>
+            <a:r>
+              <a:rPr sz="1700" b="0" i="0">
                 <a:solidFill>
                   <a:srgbClr val="1A1A1A"/>
                 </a:solidFill>
                 <a:latin typeface="Calibri"/>
               </a:rPr>
-              <a:t>Paper 2</a:t>
-            </a:r>
-          </a:p>
-          <a:p>
-            <a:pPr>
-              <a:spcAft>
-                <a:spcPts val="0"/>
-              </a:spcAft>
-            </a:pPr>
-            <a:r>
-              <a:rPr sz="1500" b="0" i="0">
-                <a:solidFill>
-                  <a:srgbClr val="595959"/>
-                </a:solidFill>
-                <a:latin typeface="Calibri"/>
-              </a:rPr>
-              <a:t>The instrument, the corpus, the field bound. Physica A.</a:t>
-            </a:r>
-          </a:p>
-        </p:txBody>
-      </p:sp>
-      <p:sp>
-        <p:nvSpPr>
-          <p:cNvPr id="7" name="TextBox 6"/>
-          <p:cNvSpPr txBox="1"/>
-          <p:nvPr/>
-        </p:nvSpPr>
-        <p:spPr>
-          <a:xfrm>
-            <a:off x="9381744" y="1554480"/>
-            <a:ext cx="2606040" cy="2743200"/>
-          </a:xfrm>
-          <a:prstGeom prst="rect">
-            <a:avLst/>
-          </a:prstGeom>
-          <a:noFill/>
-        </p:spPr>
-        <p:txBody>
-          <a:bodyPr wrap="square" anchor="t">
-            <a:spAutoFit/>
-          </a:bodyPr>
-          <a:lstStyle/>
-          <a:p>
-            <a:pPr algn="l">
-              <a:spcAft>
-                <a:spcPts val="400"/>
-              </a:spcAft>
-            </a:pPr>
-            <a:r>
-              <a:rPr sz="2200" b="1" i="0">
-                <a:solidFill>
-                  <a:srgbClr val="2E75B6"/>
-                </a:solidFill>
-                <a:latin typeface="Calibri"/>
-              </a:rPr>
-              <a:t>6 pp</a:t>
-            </a:r>
-          </a:p>
-          <a:p>
-            <a:pPr>
-              <a:spcAft>
-                <a:spcPts val="800"/>
-              </a:spcAft>
-            </a:pPr>
-            <a:r>
-              <a:rPr sz="2000" b="1" i="0">
-                <a:solidFill>
-                  <a:srgbClr val="1A1A1A"/>
-                </a:solidFill>
-                <a:latin typeface="Calibri"/>
-              </a:rPr>
-              <a:t>Paper 3</a:t>
-            </a:r>
-          </a:p>
-          <a:p>
-            <a:pPr>
-              <a:spcAft>
-                <a:spcPts val="0"/>
-              </a:spcAft>
-            </a:pPr>
-            <a:r>
-              <a:rPr sz="1500" b="0" i="0">
-                <a:solidFill>
-                  <a:srgbClr val="595959"/>
-                </a:solidFill>
-                <a:latin typeface="Calibri"/>
-              </a:rPr>
-              <a:t>The measured ceiling and the replication. Imaging Neuroscience. One computation on its final run.</a:t>
-            </a:r>
-          </a:p>
-        </p:txBody>
-      </p:sp>
-      <p:sp>
-        <p:nvSpPr>
-          <p:cNvPr id="8" name="Rectangle 7"/>
-          <p:cNvSpPr/>
-          <p:nvPr/>
-        </p:nvSpPr>
-        <p:spPr>
-          <a:xfrm>
-            <a:off x="685800" y="4526280"/>
-            <a:ext cx="10820095" cy="19050"/>
-          </a:xfrm>
-          <a:prstGeom prst="rect">
-            <a:avLst/>
-          </a:prstGeom>
-          <a:solidFill>
-            <a:srgbClr val="D9D9D9"/>
-          </a:solidFill>
-          <a:ln>
-            <a:noFill/>
-          </a:ln>
-          <a:effectLst/>
-        </p:spPr>
-        <p:style>
-          <a:lnRef idx="1">
-            <a:schemeClr val="accent1"/>
-          </a:lnRef>
-          <a:fillRef idx="3">
-            <a:schemeClr val="accent1"/>
-          </a:fillRef>
-          <a:effectRef idx="2">
-            <a:schemeClr val="accent1"/>
-          </a:effectRef>
-          <a:fontRef idx="minor">
-            <a:schemeClr val="lt1"/>
-          </a:fontRef>
-        </p:style>
-        <p:txBody>
-          <a:bodyPr rtlCol="0" anchor="ctr"/>
-          <a:lstStyle/>
-          <a:p>
-            <a:pPr algn="ctr"/>
-          </a:p>
-        </p:txBody>
-      </p:sp>
-      <p:sp>
-        <p:nvSpPr>
-          <p:cNvPr id="9" name="TextBox 8"/>
-          <p:cNvSpPr txBox="1"/>
-          <p:nvPr/>
-        </p:nvSpPr>
-        <p:spPr>
-          <a:xfrm>
-            <a:off x="685800" y="4754880"/>
-            <a:ext cx="10820095" cy="822960"/>
-          </a:xfrm>
-          <a:prstGeom prst="rect">
-            <a:avLst/>
-          </a:prstGeom>
-          <a:noFill/>
-        </p:spPr>
-        <p:txBody>
-          <a:bodyPr wrap="square" anchor="t">
-            <a:spAutoFit/>
-          </a:bodyPr>
-          <a:lstStyle/>
-          <a:p>
-            <a:pPr algn="l">
-              <a:spcAft>
-                <a:spcPts val="0"/>
-              </a:spcAft>
-            </a:pPr>
-            <a:r>
-              <a:rPr sz="1900" b="0" i="0">
-                <a:solidFill>
-                  <a:srgbClr val="1A1A1A"/>
-                </a:solidFill>
-                <a:latin typeface="Calibri"/>
-              </a:rPr>
-              <a:t>Every number in all four comes from a re-runnable script. Nothing is transcribed by hand.</a:t>
+              <a:t>•  Any verdict on one article. 12.8% reverse between sessions.</a:t>
             </a:r>
           </a:p>
         </p:txBody>
@@ -10060,7 +9928,7 @@
       <p:grpSpPr/>
       <p:pic>
         <p:nvPicPr>
-          <p:cNvPr id="2" name="Picture 1" descr="flag-banner.png"/>
+          <p:cNvPr id="2" name="Picture 1" descr="books.png"/>
           <p:cNvPicPr>
             <a:picLocks noChangeAspect="1"/>
           </p:cNvPicPr>
@@ -10116,7 +9984,7 @@
                 </a:solidFill>
                 <a:latin typeface="Calibri"/>
               </a:rPr>
-              <a:t>Conclusions</a:t>
+              <a:t>The work yields a dissertation and three papers</a:t>
             </a:r>
           </a:p>
         </p:txBody>
@@ -10129,8 +9997,8 @@
         </p:nvSpPr>
         <p:spPr>
           <a:xfrm>
-            <a:off x="685800" y="1371600"/>
-            <a:ext cx="10820095" cy="3840480"/>
+            <a:off x="685800" y="1554480"/>
+            <a:ext cx="2606040" cy="2743200"/>
           </a:xfrm>
           <a:prstGeom prst="rect">
             <a:avLst/>
@@ -10145,150 +10013,275 @@
           <a:p>
             <a:pPr algn="l">
               <a:spcAft>
-                <a:spcPts val="1400"/>
-              </a:spcAft>
-            </a:pPr>
-            <a:r>
-              <a:rPr sz="1800" b="1">
+                <a:spcPts val="400"/>
+              </a:spcAft>
+            </a:pPr>
+            <a:r>
+              <a:rPr sz="2200" b="1" i="0">
                 <a:solidFill>
                   <a:srgbClr val="2E75B6"/>
                 </a:solidFill>
                 <a:latin typeface="Calibri"/>
               </a:rPr>
-              <a:t>1.  </a:t>
-            </a:r>
-            <a:r>
-              <a:rPr sz="1800" b="1">
+              <a:t>78 pp</a:t>
+            </a:r>
+          </a:p>
+          <a:p>
+            <a:pPr>
+              <a:spcAft>
+                <a:spcPts val="800"/>
+              </a:spcAft>
+            </a:pPr>
+            <a:r>
+              <a:rPr sz="2000" b="1" i="0">
                 <a:solidFill>
                   <a:srgbClr val="1A1A1A"/>
                 </a:solidFill>
                 <a:latin typeface="Calibri"/>
               </a:rPr>
-              <a:t>A field observable can be measured from content. </a:t>
-            </a:r>
-            <a:r>
-              <a:rPr sz="1800" b="0">
+              <a:t>Dissertation</a:t>
+            </a:r>
+          </a:p>
+          <a:p>
+            <a:pPr>
+              <a:spcAft>
+                <a:spcPts val="0"/>
+              </a:spcAft>
+            </a:pPr>
+            <a:r>
+              <a:rPr sz="1500" b="0" i="0">
+                <a:solidFill>
+                  <a:srgbClr val="595959"/>
+                </a:solidFill>
+                <a:latin typeface="Calibri"/>
+              </a:rPr>
+              <a:t>Complete, review answered.</a:t>
+            </a:r>
+          </a:p>
+        </p:txBody>
+      </p:sp>
+      <p:sp>
+        <p:nvSpPr>
+          <p:cNvPr id="5" name="TextBox 4"/>
+          <p:cNvSpPr txBox="1"/>
+          <p:nvPr/>
+        </p:nvSpPr>
+        <p:spPr>
+          <a:xfrm>
+            <a:off x="3584448" y="1554480"/>
+            <a:ext cx="2606040" cy="2743200"/>
+          </a:xfrm>
+          <a:prstGeom prst="rect">
+            <a:avLst/>
+          </a:prstGeom>
+          <a:noFill/>
+        </p:spPr>
+        <p:txBody>
+          <a:bodyPr wrap="square" anchor="t">
+            <a:spAutoFit/>
+          </a:bodyPr>
+          <a:lstStyle/>
+          <a:p>
+            <a:pPr algn="l">
+              <a:spcAft>
+                <a:spcPts val="400"/>
+              </a:spcAft>
+            </a:pPr>
+            <a:r>
+              <a:rPr sz="2200" b="1" i="0">
+                <a:solidFill>
+                  <a:srgbClr val="2E75B6"/>
+                </a:solidFill>
+                <a:latin typeface="Calibri"/>
+              </a:rPr>
+              <a:t>12 pp</a:t>
+            </a:r>
+          </a:p>
+          <a:p>
+            <a:pPr>
+              <a:spcAft>
+                <a:spcPts val="800"/>
+              </a:spcAft>
+            </a:pPr>
+            <a:r>
+              <a:rPr sz="2000" b="1" i="0">
                 <a:solidFill>
                   <a:srgbClr val="1A1A1A"/>
                 </a:solidFill>
                 <a:latin typeface="Calibri"/>
               </a:rPr>
-              <a:t>The instrument runs, the corpus is complete, and reliability is measured rather than assumed: ICC = 0.8725.</a:t>
+              <a:t>Paper 1</a:t>
             </a:r>
           </a:p>
           <a:p>
             <a:pPr>
               <a:spcAft>
-                <a:spcPts val="1400"/>
-              </a:spcAft>
-            </a:pPr>
-            <a:r>
-              <a:rPr sz="1800" b="1">
+                <a:spcPts val="0"/>
+              </a:spcAft>
+            </a:pPr>
+            <a:r>
+              <a:rPr sz="1500" b="0" i="0">
+                <a:solidFill>
+                  <a:srgbClr val="595959"/>
+                </a:solidFill>
+                <a:latin typeface="Calibri"/>
+              </a:rPr>
+              <a:t>The bound and the screening criterion. Physica A. Independent of the scan.</a:t>
+            </a:r>
+          </a:p>
+        </p:txBody>
+      </p:sp>
+      <p:sp>
+        <p:nvSpPr>
+          <p:cNvPr id="6" name="TextBox 5"/>
+          <p:cNvSpPr txBox="1"/>
+          <p:nvPr/>
+        </p:nvSpPr>
+        <p:spPr>
+          <a:xfrm>
+            <a:off x="6483096" y="1554480"/>
+            <a:ext cx="2606040" cy="2743200"/>
+          </a:xfrm>
+          <a:prstGeom prst="rect">
+            <a:avLst/>
+          </a:prstGeom>
+          <a:noFill/>
+        </p:spPr>
+        <p:txBody>
+          <a:bodyPr wrap="square" anchor="t">
+            <a:spAutoFit/>
+          </a:bodyPr>
+          <a:lstStyle/>
+          <a:p>
+            <a:pPr algn="l">
+              <a:spcAft>
+                <a:spcPts val="400"/>
+              </a:spcAft>
+            </a:pPr>
+            <a:r>
+              <a:rPr sz="2200" b="1" i="0">
                 <a:solidFill>
                   <a:srgbClr val="2E75B6"/>
                 </a:solidFill>
                 <a:latin typeface="Calibri"/>
               </a:rPr>
-              <a:t>2.  </a:t>
-            </a:r>
-            <a:r>
-              <a:rPr sz="1800" b="1">
+              <a:t>15 pp</a:t>
+            </a:r>
+          </a:p>
+          <a:p>
+            <a:pPr>
+              <a:spcAft>
+                <a:spcPts val="800"/>
+              </a:spcAft>
+            </a:pPr>
+            <a:r>
+              <a:rPr sz="2000" b="1" i="0">
                 <a:solidFill>
                   <a:srgbClr val="1A1A1A"/>
                 </a:solidFill>
                 <a:latin typeface="Calibri"/>
               </a:rPr>
-              <a:t>It separates four corpora at 0.1068, and the separation is confounded with source. </a:t>
-            </a:r>
-            <a:r>
-              <a:rPr sz="1800" b="0">
+              <a:t>Paper 2</a:t>
+            </a:r>
+          </a:p>
+          <a:p>
+            <a:pPr>
+              <a:spcAft>
+                <a:spcPts val="0"/>
+              </a:spcAft>
+            </a:pPr>
+            <a:r>
+              <a:rPr sz="1500" b="0" i="0">
+                <a:solidFill>
+                  <a:srgbClr val="595959"/>
+                </a:solidFill>
+                <a:latin typeface="Calibri"/>
+              </a:rPr>
+              <a:t>The instrument, the corpus, the field bound. Physica A.</a:t>
+            </a:r>
+          </a:p>
+        </p:txBody>
+      </p:sp>
+      <p:sp>
+        <p:nvSpPr>
+          <p:cNvPr id="7" name="TextBox 6"/>
+          <p:cNvSpPr txBox="1"/>
+          <p:nvPr/>
+        </p:nvSpPr>
+        <p:spPr>
+          <a:xfrm>
+            <a:off x="9381744" y="1554480"/>
+            <a:ext cx="2606040" cy="2743200"/>
+          </a:xfrm>
+          <a:prstGeom prst="rect">
+            <a:avLst/>
+          </a:prstGeom>
+          <a:noFill/>
+        </p:spPr>
+        <p:txBody>
+          <a:bodyPr wrap="square" anchor="t">
+            <a:spAutoFit/>
+          </a:bodyPr>
+          <a:lstStyle/>
+          <a:p>
+            <a:pPr algn="l">
+              <a:spcAft>
+                <a:spcPts val="400"/>
+              </a:spcAft>
+            </a:pPr>
+            <a:r>
+              <a:rPr sz="2200" b="1" i="0">
+                <a:solidFill>
+                  <a:srgbClr val="2E75B6"/>
+                </a:solidFill>
+                <a:latin typeface="Calibri"/>
+              </a:rPr>
+              <a:t>6 pp</a:t>
+            </a:r>
+          </a:p>
+          <a:p>
+            <a:pPr>
+              <a:spcAft>
+                <a:spcPts val="800"/>
+              </a:spcAft>
+            </a:pPr>
+            <a:r>
+              <a:rPr sz="2000" b="1" i="0">
                 <a:solidFill>
                   <a:srgbClr val="1A1A1A"/>
                 </a:solidFill>
                 <a:latin typeface="Calibri"/>
               </a:rPr>
-              <a:t>Both halves are reported, the confound first.</a:t>
+              <a:t>Paper 3</a:t>
             </a:r>
           </a:p>
           <a:p>
             <a:pPr>
               <a:spcAft>
-                <a:spcPts val="1400"/>
-              </a:spcAft>
-            </a:pPr>
-            <a:r>
-              <a:rPr sz="1800" b="1">
-                <a:solidFill>
-                  <a:srgbClr val="2E75B6"/>
-                </a:solidFill>
-                <a:latin typeface="Calibri"/>
-              </a:rPr>
-              <a:t>3.  </a:t>
-            </a:r>
-            <a:r>
-              <a:rPr sz="1800" b="1">
-                <a:solidFill>
-                  <a:srgbClr val="1A1A1A"/>
-                </a:solidFill>
-                <a:latin typeface="Calibri"/>
-              </a:rPr>
-              <a:t>The coupling is unidentified, so the thesis reports a bound instead. </a:t>
-            </a:r>
-            <a:r>
-              <a:rPr sz="1800" b="0">
-                <a:solidFill>
-                  <a:srgbClr val="1A1A1A"/>
-                </a:solidFill>
-                <a:latin typeface="Calibri"/>
-              </a:rPr>
-              <a:t>With ΔX = 0.1241, α ≥ 4.294 at βJ = 2 — a constraint on any future proposal of this mechanism.</a:t>
-            </a:r>
-          </a:p>
-          <a:p>
-            <a:pPr>
-              <a:spcAft>
-                <a:spcPts val="1400"/>
-              </a:spcAft>
-            </a:pPr>
-            <a:r>
-              <a:rPr sz="1800" b="1">
-                <a:solidFill>
-                  <a:srgbClr val="2E75B6"/>
-                </a:solidFill>
-                <a:latin typeface="Calibri"/>
-              </a:rPr>
-              <a:t>4.  </a:t>
-            </a:r>
-            <a:r>
-              <a:rPr sz="1800" b="1">
-                <a:solidFill>
-                  <a:srgbClr val="1A1A1A"/>
-                </a:solidFill>
-                <a:latin typeface="Calibri"/>
-              </a:rPr>
-              <a:t>The instrument's own validity is now a measurable question. </a:t>
-            </a:r>
-            <a:r>
-              <a:rPr sz="1800" b="0">
-                <a:solidFill>
-                  <a:srgbClr val="1A1A1A"/>
-                </a:solidFill>
-                <a:latin typeface="Calibri"/>
-              </a:rPr>
-              <a:t>The noise ceiling is 0.1517; one prediction pass remains.</a:t>
-            </a:r>
-          </a:p>
-        </p:txBody>
-      </p:sp>
-      <p:sp>
-        <p:nvSpPr>
-          <p:cNvPr id="5" name="Rectangle 4"/>
+                <a:spcPts val="0"/>
+              </a:spcAft>
+            </a:pPr>
+            <a:r>
+              <a:rPr sz="1500" b="0" i="0">
+                <a:solidFill>
+                  <a:srgbClr val="595959"/>
+                </a:solidFill>
+                <a:latin typeface="Calibri"/>
+              </a:rPr>
+              <a:t>The measured ceiling and the replication. Imaging Neuroscience. One computation on its final run.</a:t>
+            </a:r>
+          </a:p>
+        </p:txBody>
+      </p:sp>
+      <p:sp>
+        <p:nvSpPr>
+          <p:cNvPr id="8" name="Rectangle 7"/>
           <p:cNvSpPr/>
           <p:nvPr/>
         </p:nvSpPr>
         <p:spPr>
           <a:xfrm>
-            <a:off x="685800" y="5349240"/>
+            <a:off x="685800" y="4526280"/>
             <a:ext cx="10820095" cy="19050"/>
           </a:xfrm>
           <a:prstGeom prst="rect">
@@ -10326,14 +10319,14 @@
       </p:sp>
       <p:sp>
         <p:nvSpPr>
-          <p:cNvPr id="6" name="TextBox 5"/>
-          <p:cNvSpPr txBox="1"/>
-          <p:nvPr/>
-        </p:nvSpPr>
-        <p:spPr>
-          <a:xfrm>
-            <a:off x="685800" y="5532120"/>
-            <a:ext cx="10820095" cy="457200"/>
+          <p:cNvPr id="9" name="TextBox 8"/>
+          <p:cNvSpPr txBox="1"/>
+          <p:nvPr/>
+        </p:nvSpPr>
+        <p:spPr>
+          <a:xfrm>
+            <a:off x="685800" y="4754880"/>
+            <a:ext cx="10820095" cy="822960"/>
           </a:xfrm>
           <a:prstGeom prst="rect">
             <a:avLst/>
@@ -10352,20 +10345,20 @@
               </a:spcAft>
             </a:pPr>
             <a:r>
-              <a:rPr sz="1400" b="0" i="0">
-                <a:solidFill>
-                  <a:srgbClr val="595959"/>
-                </a:solidFill>
-                <a:latin typeface="Calibri"/>
-              </a:rPr>
-              <a:t>Brian Mwai  ·  1050555  ·  monarch-4iy.pages.dev  ·  github.com/brn-mwai/monarch</a:t>
-            </a:r>
-          </a:p>
-        </p:txBody>
-      </p:sp>
-      <p:sp>
-        <p:nvSpPr>
-          <p:cNvPr id="7" name="TextBox 6"/>
+              <a:rPr sz="1900" b="0" i="0">
+                <a:solidFill>
+                  <a:srgbClr val="1A1A1A"/>
+                </a:solidFill>
+                <a:latin typeface="Calibri"/>
+              </a:rPr>
+              <a:t>Every number in all four comes from a re-runnable script. Nothing is transcribed by hand.</a:t>
+            </a:r>
+          </a:p>
+        </p:txBody>
+      </p:sp>
+      <p:sp>
+        <p:nvSpPr>
+          <p:cNvPr id="10" name="TextBox 9"/>
           <p:cNvSpPr txBox="1"/>
           <p:nvPr/>
         </p:nvSpPr>
@@ -10404,7 +10397,7 @@
       </p:sp>
       <p:sp>
         <p:nvSpPr>
-          <p:cNvPr id="8" name="TextBox 7"/>
+          <p:cNvPr id="11" name="TextBox 10"/>
           <p:cNvSpPr txBox="1"/>
           <p:nvPr/>
         </p:nvSpPr>
@@ -10459,6 +10452,407 @@
         <p:nvPr/>
       </p:nvGrpSpPr>
       <p:grpSpPr/>
+      <p:pic>
+        <p:nvPicPr>
+          <p:cNvPr id="2" name="Picture 1" descr="flag-banner.png"/>
+          <p:cNvPicPr>
+            <a:picLocks noChangeAspect="1"/>
+          </p:cNvPicPr>
+          <p:nvPr/>
+        </p:nvPicPr>
+        <p:blipFill>
+          <a:blip r:embed="rId2"/>
+          <a:stretch>
+            <a:fillRect/>
+          </a:stretch>
+        </p:blipFill>
+        <p:spPr>
+          <a:xfrm>
+            <a:off x="685800" y="365759"/>
+            <a:ext cx="420624" cy="420624"/>
+          </a:xfrm>
+          <a:prstGeom prst="rect">
+            <a:avLst/>
+          </a:prstGeom>
+        </p:spPr>
+      </p:pic>
+      <p:sp>
+        <p:nvSpPr>
+          <p:cNvPr id="3" name="TextBox 2"/>
+          <p:cNvSpPr txBox="1"/>
+          <p:nvPr/>
+        </p:nvSpPr>
+        <p:spPr>
+          <a:xfrm>
+            <a:off x="1289304" y="310896"/>
+            <a:ext cx="10216591" cy="822960"/>
+          </a:xfrm>
+          <a:prstGeom prst="rect">
+            <a:avLst/>
+          </a:prstGeom>
+          <a:noFill/>
+        </p:spPr>
+        <p:txBody>
+          <a:bodyPr wrap="square" anchor="t">
+            <a:spAutoFit/>
+          </a:bodyPr>
+          <a:lstStyle/>
+          <a:p>
+            <a:pPr algn="l">
+              <a:spcAft>
+                <a:spcPts val="0"/>
+              </a:spcAft>
+            </a:pPr>
+            <a:r>
+              <a:rPr sz="2600" b="1" i="0">
+                <a:solidFill>
+                  <a:srgbClr val="1F4E79"/>
+                </a:solidFill>
+                <a:latin typeface="Calibri"/>
+              </a:rPr>
+              <a:t>Conclusions</a:t>
+            </a:r>
+          </a:p>
+        </p:txBody>
+      </p:sp>
+      <p:sp>
+        <p:nvSpPr>
+          <p:cNvPr id="4" name="TextBox 3"/>
+          <p:cNvSpPr txBox="1"/>
+          <p:nvPr/>
+        </p:nvSpPr>
+        <p:spPr>
+          <a:xfrm>
+            <a:off x="685800" y="1371600"/>
+            <a:ext cx="10820095" cy="3840480"/>
+          </a:xfrm>
+          <a:prstGeom prst="rect">
+            <a:avLst/>
+          </a:prstGeom>
+          <a:noFill/>
+        </p:spPr>
+        <p:txBody>
+          <a:bodyPr wrap="square" anchor="t">
+            <a:spAutoFit/>
+          </a:bodyPr>
+          <a:lstStyle/>
+          <a:p>
+            <a:pPr algn="l">
+              <a:spcAft>
+                <a:spcPts val="1400"/>
+              </a:spcAft>
+            </a:pPr>
+            <a:r>
+              <a:rPr sz="1800" b="1">
+                <a:solidFill>
+                  <a:srgbClr val="2E75B6"/>
+                </a:solidFill>
+                <a:latin typeface="Calibri"/>
+              </a:rPr>
+              <a:t>1.  </a:t>
+            </a:r>
+            <a:r>
+              <a:rPr sz="1800" b="1">
+                <a:solidFill>
+                  <a:srgbClr val="1A1A1A"/>
+                </a:solidFill>
+                <a:latin typeface="Calibri"/>
+              </a:rPr>
+              <a:t>A field observable can be measured from content. </a:t>
+            </a:r>
+            <a:r>
+              <a:rPr sz="1800" b="0">
+                <a:solidFill>
+                  <a:srgbClr val="1A1A1A"/>
+                </a:solidFill>
+                <a:latin typeface="Calibri"/>
+              </a:rPr>
+              <a:t>The instrument runs, the corpus is complete, and reliability is measured rather than assumed: ICC = 0.8725.</a:t>
+            </a:r>
+          </a:p>
+          <a:p>
+            <a:pPr>
+              <a:spcAft>
+                <a:spcPts val="1400"/>
+              </a:spcAft>
+            </a:pPr>
+            <a:r>
+              <a:rPr sz="1800" b="1">
+                <a:solidFill>
+                  <a:srgbClr val="2E75B6"/>
+                </a:solidFill>
+                <a:latin typeface="Calibri"/>
+              </a:rPr>
+              <a:t>2.  </a:t>
+            </a:r>
+            <a:r>
+              <a:rPr sz="1800" b="1">
+                <a:solidFill>
+                  <a:srgbClr val="1A1A1A"/>
+                </a:solidFill>
+                <a:latin typeface="Calibri"/>
+              </a:rPr>
+              <a:t>It separates four corpora at 0.1068, and the separation is confounded with source. </a:t>
+            </a:r>
+            <a:r>
+              <a:rPr sz="1800" b="0">
+                <a:solidFill>
+                  <a:srgbClr val="1A1A1A"/>
+                </a:solidFill>
+                <a:latin typeface="Calibri"/>
+              </a:rPr>
+              <a:t>Both halves are reported, the confound first.</a:t>
+            </a:r>
+          </a:p>
+          <a:p>
+            <a:pPr>
+              <a:spcAft>
+                <a:spcPts val="1400"/>
+              </a:spcAft>
+            </a:pPr>
+            <a:r>
+              <a:rPr sz="1800" b="1">
+                <a:solidFill>
+                  <a:srgbClr val="2E75B6"/>
+                </a:solidFill>
+                <a:latin typeface="Calibri"/>
+              </a:rPr>
+              <a:t>3.  </a:t>
+            </a:r>
+            <a:r>
+              <a:rPr sz="1800" b="1">
+                <a:solidFill>
+                  <a:srgbClr val="1A1A1A"/>
+                </a:solidFill>
+                <a:latin typeface="Calibri"/>
+              </a:rPr>
+              <a:t>The coupling is unidentified, so the thesis reports a bound instead. </a:t>
+            </a:r>
+            <a:r>
+              <a:rPr sz="1800" b="0">
+                <a:solidFill>
+                  <a:srgbClr val="1A1A1A"/>
+                </a:solidFill>
+                <a:latin typeface="Calibri"/>
+              </a:rPr>
+              <a:t>With ΔX = 0.1241, α ≥ 4.294 at βJ = 2 — a constraint on any future proposal of this mechanism.</a:t>
+            </a:r>
+          </a:p>
+          <a:p>
+            <a:pPr>
+              <a:spcAft>
+                <a:spcPts val="1400"/>
+              </a:spcAft>
+            </a:pPr>
+            <a:r>
+              <a:rPr sz="1800" b="1">
+                <a:solidFill>
+                  <a:srgbClr val="2E75B6"/>
+                </a:solidFill>
+                <a:latin typeface="Calibri"/>
+              </a:rPr>
+              <a:t>4.  </a:t>
+            </a:r>
+            <a:r>
+              <a:rPr sz="1800" b="1">
+                <a:solidFill>
+                  <a:srgbClr val="1A1A1A"/>
+                </a:solidFill>
+                <a:latin typeface="Calibri"/>
+              </a:rPr>
+              <a:t>The instrument's own validity is now a measurable question. </a:t>
+            </a:r>
+            <a:r>
+              <a:rPr sz="1800" b="0">
+                <a:solidFill>
+                  <a:srgbClr val="1A1A1A"/>
+                </a:solidFill>
+                <a:latin typeface="Calibri"/>
+              </a:rPr>
+              <a:t>The noise ceiling is 0.1517; one prediction pass remains.</a:t>
+            </a:r>
+          </a:p>
+        </p:txBody>
+      </p:sp>
+      <p:sp>
+        <p:nvSpPr>
+          <p:cNvPr id="5" name="Rectangle 4"/>
+          <p:cNvSpPr/>
+          <p:nvPr/>
+        </p:nvSpPr>
+        <p:spPr>
+          <a:xfrm>
+            <a:off x="685800" y="5349240"/>
+            <a:ext cx="10820095" cy="19050"/>
+          </a:xfrm>
+          <a:prstGeom prst="rect">
+            <a:avLst/>
+          </a:prstGeom>
+          <a:solidFill>
+            <a:srgbClr val="D9D9D9"/>
+          </a:solidFill>
+          <a:ln>
+            <a:noFill/>
+          </a:ln>
+          <a:effectLst/>
+        </p:spPr>
+        <p:style>
+          <a:lnRef idx="1">
+            <a:schemeClr val="accent1"/>
+          </a:lnRef>
+          <a:fillRef idx="3">
+            <a:schemeClr val="accent1"/>
+          </a:fillRef>
+          <a:effectRef idx="2">
+            <a:schemeClr val="accent1"/>
+          </a:effectRef>
+          <a:fontRef idx="minor">
+            <a:schemeClr val="lt1"/>
+          </a:fontRef>
+        </p:style>
+        <p:txBody>
+          <a:bodyPr rtlCol="0" anchor="ctr"/>
+          <a:lstStyle/>
+          <a:p>
+            <a:pPr algn="ctr"/>
+          </a:p>
+        </p:txBody>
+      </p:sp>
+      <p:sp>
+        <p:nvSpPr>
+          <p:cNvPr id="6" name="TextBox 5"/>
+          <p:cNvSpPr txBox="1"/>
+          <p:nvPr/>
+        </p:nvSpPr>
+        <p:spPr>
+          <a:xfrm>
+            <a:off x="685800" y="5532120"/>
+            <a:ext cx="10820095" cy="457200"/>
+          </a:xfrm>
+          <a:prstGeom prst="rect">
+            <a:avLst/>
+          </a:prstGeom>
+          <a:noFill/>
+        </p:spPr>
+        <p:txBody>
+          <a:bodyPr wrap="square" anchor="t">
+            <a:spAutoFit/>
+          </a:bodyPr>
+          <a:lstStyle/>
+          <a:p>
+            <a:pPr algn="l">
+              <a:spcAft>
+                <a:spcPts val="0"/>
+              </a:spcAft>
+            </a:pPr>
+            <a:r>
+              <a:rPr sz="1400" b="0" i="0">
+                <a:solidFill>
+                  <a:srgbClr val="595959"/>
+                </a:solidFill>
+                <a:latin typeface="Calibri"/>
+              </a:rPr>
+              <a:t>Brian Mwai  ·  1050555  ·  monarch-4iy.pages.dev  ·  github.com/brn-mwai/monarch</a:t>
+            </a:r>
+          </a:p>
+        </p:txBody>
+      </p:sp>
+      <p:sp>
+        <p:nvSpPr>
+          <p:cNvPr id="7" name="TextBox 6"/>
+          <p:cNvSpPr txBox="1"/>
+          <p:nvPr/>
+        </p:nvSpPr>
+        <p:spPr>
+          <a:xfrm>
+            <a:off x="685800" y="6291072"/>
+            <a:ext cx="4572000" cy="320040"/>
+          </a:xfrm>
+          <a:prstGeom prst="rect">
+            <a:avLst/>
+          </a:prstGeom>
+          <a:noFill/>
+        </p:spPr>
+        <p:txBody>
+          <a:bodyPr wrap="square" anchor="t">
+            <a:spAutoFit/>
+          </a:bodyPr>
+          <a:lstStyle/>
+          <a:p>
+            <a:pPr algn="l">
+              <a:spcAft>
+                <a:spcPts val="0"/>
+              </a:spcAft>
+            </a:pPr>
+            <a:r>
+              <a:rPr sz="1100" b="0" i="0">
+                <a:solidFill>
+                  <a:srgbClr val="595959"/>
+                </a:solidFill>
+                <a:latin typeface="Calibri"/>
+              </a:rPr>
+              <a:t>Standing</a:t>
+            </a:r>
+          </a:p>
+        </p:txBody>
+      </p:sp>
+      <p:sp>
+        <p:nvSpPr>
+          <p:cNvPr id="8" name="TextBox 7"/>
+          <p:cNvSpPr txBox="1"/>
+          <p:nvPr/>
+        </p:nvSpPr>
+        <p:spPr>
+          <a:xfrm>
+            <a:off x="10591495" y="6291072"/>
+            <a:ext cx="914400" cy="320040"/>
+          </a:xfrm>
+          <a:prstGeom prst="rect">
+            <a:avLst/>
+          </a:prstGeom>
+          <a:noFill/>
+        </p:spPr>
+        <p:txBody>
+          <a:bodyPr wrap="square" anchor="t">
+            <a:spAutoFit/>
+          </a:bodyPr>
+          <a:lstStyle/>
+          <a:p>
+            <a:pPr algn="r">
+              <a:spcAft>
+                <a:spcPts val="0"/>
+              </a:spcAft>
+            </a:pPr>
+            <a:r>
+              <a:rPr sz="1100" b="0" i="0">
+                <a:solidFill>
+                  <a:srgbClr val="595959"/>
+                </a:solidFill>
+                <a:latin typeface="Calibri"/>
+              </a:rPr>
+              <a:t>28</a:t>
+            </a:r>
+          </a:p>
+        </p:txBody>
+      </p:sp>
+    </p:spTree>
+  </p:cSld>
+  <p:clrMapOvr>
+    <a:masterClrMapping/>
+  </p:clrMapOvr>
+</p:sld>
+</file>
+
+<file path=ppt/slides/slide29.xml><?xml version="1.0" encoding="utf-8"?>
+<p:sld xmlns:a="http://schemas.openxmlformats.org/drawingml/2006/main" xmlns:p="http://schemas.openxmlformats.org/presentationml/2006/main" xmlns:r="http://schemas.openxmlformats.org/officeDocument/2006/relationships">
+  <p:cSld>
+    <p:spTree>
+      <p:nvGrpSpPr>
+        <p:cNvPr id="1" name=""/>
+        <p:cNvGrpSpPr/>
+        <p:nvPr/>
+      </p:nvGrpSpPr>
+      <p:grpSpPr/>
       <p:sp>
         <p:nvSpPr>
           <p:cNvPr id="2" name="TextBox 1"/>
@@ -10722,7 +11116,7 @@
                 </a:solidFill>
                 <a:latin typeface="Calibri"/>
               </a:rPr>
-              <a:t>28</a:t>
+              <a:t>29</a:t>
             </a:r>
           </a:p>
         </p:txBody>

--- a/docs/defence/Monarch_Defence.pptx
+++ b/docs/defence/Monarch_Defence.pptx
@@ -10023,7 +10023,7 @@
                 </a:solidFill>
                 <a:latin typeface="Calibri"/>
               </a:rPr>
-              <a:t>78 pp</a:t>
+              <a:t>81 pp</a:t>
             </a:r>
           </a:p>
           <a:p>
@@ -10990,7 +10990,7 @@
                 </a:solidFill>
                 <a:latin typeface="Calibri"/>
               </a:rPr>
-              <a:t>Korbel, J., Dahdoul, R., Thurner, S. (2026). Critical campaign spending in a double-random field Ising model of elections. Phys. Rev. Lett. 136, 127402.</a:t>
+              <a:t>Korbel, J., Dahdoul, R., Thurner, S. (2026). Empirical validation of the polarization transition in a double-random field model of elections. Phys. Rev. Lett. 136, 127402.</a:t>
             </a:r>
           </a:p>
           <a:p>

--- a/docs/defence/Monarch_Defence.pptx
+++ b/docs/defence/Monarch_Defence.pptx
@@ -3336,7 +3336,7 @@
                 </a:solidFill>
                 <a:latin typeface="Calibri"/>
               </a:rPr>
-              <a:t>3 September 2026</a:t>
+              <a:t>September 2026</a:t>
             </a:r>
           </a:p>
         </p:txBody>
@@ -3527,7 +3527,7 @@
                 </a:solidFill>
                 <a:latin typeface="Calibri"/>
               </a:rPr>
-              <a:t>Output is (T, 20484). There is no subcortical head.</a:t>
+              <a:t>No subcortical output.</a:t>
             </a:r>
           </a:p>
           <a:p>
@@ -3543,7 +3543,7 @@
                 </a:solidFill>
                 <a:latin typeface="Calibri"/>
               </a:rPr>
-              <a:t>The amygdala is not predicted, so the proposal's central equation cannot be computed.</a:t>
+              <a:t>No amygdala, so the proposal's equation cannot be computed.</a:t>
             </a:r>
           </a:p>
         </p:txBody>
@@ -3614,7 +3614,7 @@
                 </a:solidFill>
                 <a:latin typeface="Calibri"/>
               </a:rPr>
-              <a:t>The loader forces average_subjects.</a:t>
+              <a:t>The loader forces it.</a:t>
             </a:r>
           </a:p>
           <a:p>
@@ -3630,7 +3630,7 @@
                 </a:solidFill>
                 <a:latin typeface="Calibri"/>
               </a:rPr>
-              <a:t>It predicts a typical viewer. Whether that carries signal is the third paper's question.</a:t>
+              <a:t>It predicts a typical viewer, which Paper 3 tests.</a:t>
             </a:r>
           </a:p>
         </p:txBody>
@@ -3701,7 +3701,7 @@
                 </a:solidFill>
                 <a:latin typeface="Calibri"/>
               </a:rPr>
-              <a:t>Region means sit near zero, so a ratio sign-flips or explodes.</a:t>
+              <a:t>Means sit near zero, so a ratio breaks.</a:t>
             </a:r>
           </a:p>
           <a:p>
@@ -3717,7 +3717,7 @@
                 </a:solidFill>
                 <a:latin typeface="Calibri"/>
               </a:rPr>
-              <a:t>Undefined for 69 of 400 items. Replaced by the difference.</a:t>
+              <a:t>Undefined for 69 of 400 items; the difference replaces it.</a:t>
             </a:r>
           </a:p>
         </p:txBody>
@@ -3756,7 +3756,7 @@
                 </a:solidFill>
                 <a:latin typeface="Calibri"/>
               </a:rPr>
-              <a:t>Each was found by testing the artifact, and each is stated in the abstract rather than the limitations.</a:t>
+              <a:t>All three were found by testing the checkpoint, before any result.</a:t>
             </a:r>
           </a:p>
         </p:txBody>
@@ -5185,7 +5185,7 @@
         <p:spPr>
           <a:xfrm>
             <a:off x="9402775" y="1728216"/>
-            <a:ext cx="2926080" cy="411480"/>
+            <a:ext cx="2651760" cy="411480"/>
           </a:xfrm>
           <a:prstGeom prst="rect">
             <a:avLst/>
@@ -5307,7 +5307,7 @@
         <p:spPr>
           <a:xfrm>
             <a:off x="5434279" y="2505456"/>
-            <a:ext cx="2926080" cy="411480"/>
+            <a:ext cx="2651760" cy="411480"/>
           </a:xfrm>
           <a:prstGeom prst="rect">
             <a:avLst/>
@@ -5429,7 +5429,7 @@
         <p:spPr>
           <a:xfrm>
             <a:off x="3584448" y="3282696"/>
-            <a:ext cx="2926080" cy="411480"/>
+            <a:ext cx="2651760" cy="411480"/>
           </a:xfrm>
           <a:prstGeom prst="rect">
             <a:avLst/>
@@ -6806,13 +6806,13 @@
               </a:spcAft>
             </a:pPr>
             <a:r>
-              <a:rPr sz="1700" b="0" i="0">
+              <a:rPr sz="1800" b="0" i="0">
                 <a:solidFill>
                   <a:srgbClr val="1A1A1A"/>
                 </a:solidFill>
                 <a:latin typeface="Calibri"/>
               </a:rPr>
-              <a:t>Same 400 rows, same pre-scan label. Sentiment (VADER) does not clear chance, 0.5392. On the 150 ISOT items, the one source carrying both classes, TF-IDF still reaches 0.9724. A probe on the same words recovers the source dataset at 66.25% against 25% chance, so much of the lexical win is provenance.</a:t>
+              <a:t>Same 400 rows, same label. Sentiment (VADER) sits at chance, 0.5392. The same words guess the source 66% of the time against 25% chance, so much of the lexical win is provenance.</a:t>
             </a:r>
           </a:p>
         </p:txBody>
@@ -6825,7 +6825,7 @@
         </p:nvSpPr>
         <p:spPr>
           <a:xfrm>
-            <a:off x="685800" y="4846320"/>
+            <a:off x="685800" y="4663440"/>
             <a:ext cx="10820095" cy="731520"/>
           </a:xfrm>
           <a:prstGeom prst="rect">
@@ -6851,7 +6851,7 @@
                 </a:solidFill>
                 <a:latin typeface="Calibri"/>
               </a:rPr>
-              <a:t>The index is carried forward as the field observable the physics needs, not as a detector.</a:t>
+              <a:t>The index is a field observable for the physics, not a detector.</a:t>
             </a:r>
           </a:p>
         </p:txBody>
@@ -6864,8 +6864,8 @@
         </p:nvSpPr>
         <p:spPr>
           <a:xfrm>
-            <a:off x="685800" y="6291072"/>
-            <a:ext cx="4572000" cy="320040"/>
+            <a:off x="685800" y="5897880"/>
+            <a:ext cx="10820095" cy="384048"/>
           </a:xfrm>
           <a:prstGeom prst="rect">
             <a:avLst/>
@@ -6890,6 +6890,45 @@
                 </a:solidFill>
                 <a:latin typeface="Calibri"/>
               </a:rPr>
+              <a:t>Hutto &amp; Gilbert (2014), VADER.</a:t>
+            </a:r>
+          </a:p>
+        </p:txBody>
+      </p:sp>
+      <p:sp>
+        <p:nvSpPr>
+          <p:cNvPr id="11" name="TextBox 10"/>
+          <p:cNvSpPr txBox="1"/>
+          <p:nvPr/>
+        </p:nvSpPr>
+        <p:spPr>
+          <a:xfrm>
+            <a:off x="685800" y="6291072"/>
+            <a:ext cx="4572000" cy="320040"/>
+          </a:xfrm>
+          <a:prstGeom prst="rect">
+            <a:avLst/>
+          </a:prstGeom>
+          <a:noFill/>
+        </p:spPr>
+        <p:txBody>
+          <a:bodyPr wrap="square" anchor="t">
+            <a:spAutoFit/>
+          </a:bodyPr>
+          <a:lstStyle/>
+          <a:p>
+            <a:pPr algn="l">
+              <a:spcAft>
+                <a:spcPts val="0"/>
+              </a:spcAft>
+            </a:pPr>
+            <a:r>
+              <a:rPr sz="1100" b="0" i="0">
+                <a:solidFill>
+                  <a:srgbClr val="595959"/>
+                </a:solidFill>
+                <a:latin typeface="Calibri"/>
+              </a:rPr>
               <a:t>The measurement</a:t>
             </a:r>
           </a:p>
@@ -6897,7 +6936,7 @@
       </p:sp>
       <p:sp>
         <p:nvSpPr>
-          <p:cNvPr id="11" name="TextBox 10"/>
+          <p:cNvPr id="12" name="TextBox 11"/>
           <p:cNvSpPr txBox="1"/>
           <p:nvPr/>
         </p:nvSpPr>
@@ -7121,13 +7160,13 @@
               </a:spcAft>
             </a:pPr>
             <a:r>
-              <a:rPr sz="1700" b="0" i="0">
+              <a:rPr sz="1800" b="0" i="0">
                 <a:solidFill>
                   <a:srgbClr val="1A1A1A"/>
                 </a:solidFill>
                 <a:latin typeface="Calibri"/>
               </a:rPr>
-              <a:t>The separation replicates: 0.0888 on the second session against 0.1068 on the first. Both clear the detectable floor.</a:t>
+              <a:t>The separation replicates: η² = 0.0888 against 0.1068.</a:t>
             </a:r>
           </a:p>
         </p:txBody>
@@ -7238,13 +7277,13 @@
               </a:spcAft>
             </a:pPr>
             <a:r>
-              <a:rPr sz="1700" b="0" i="0">
+              <a:rPr sz="1800" b="0" i="0">
                 <a:solidFill>
                   <a:srgbClr val="1A1A1A"/>
                 </a:solidFill>
                 <a:latin typeface="Calibri"/>
               </a:rPr>
-              <a:t>51 of 400 items flip sign between sessions, so no verdict on one article appears anywhere in the analysis, the figures or the public site.</a:t>
+              <a:t>51 of 400. Noise alone predicts 55, so no verdict on one article is ever made.</a:t>
             </a:r>
           </a:p>
         </p:txBody>
@@ -7257,8 +7296,8 @@
         </p:nvSpPr>
         <p:spPr>
           <a:xfrm>
-            <a:off x="685800" y="4892040"/>
-            <a:ext cx="10820095" cy="822960"/>
+            <a:off x="685800" y="6291072"/>
+            <a:ext cx="4572000" cy="320040"/>
           </a:xfrm>
           <a:prstGeom prst="rect">
             <a:avLst/>
@@ -7277,13 +7316,13 @@
               </a:spcAft>
             </a:pPr>
             <a:r>
-              <a:rPr sz="1700" b="0" i="0">
+              <a:rPr sz="1100" b="0" i="0">
                 <a:solidFill>
                   <a:srgbClr val="595959"/>
                 </a:solidFill>
                 <a:latin typeface="Calibri"/>
               </a:rPr>
-              <a:t>Additive noise at the measured session error predicts 55.3 reversals, 95% [44, 67]; 51 are observed. Reversing items sit near zero and spread evenly across categories.</a:t>
+              <a:t>The measurement</a:t>
             </a:r>
           </a:p>
         </p:txBody>
@@ -7291,45 +7330,6 @@
       <p:sp>
         <p:nvSpPr>
           <p:cNvPr id="11" name="TextBox 10"/>
-          <p:cNvSpPr txBox="1"/>
-          <p:nvPr/>
-        </p:nvSpPr>
-        <p:spPr>
-          <a:xfrm>
-            <a:off x="685800" y="6291072"/>
-            <a:ext cx="4572000" cy="320040"/>
-          </a:xfrm>
-          <a:prstGeom prst="rect">
-            <a:avLst/>
-          </a:prstGeom>
-          <a:noFill/>
-        </p:spPr>
-        <p:txBody>
-          <a:bodyPr wrap="square" anchor="t">
-            <a:spAutoFit/>
-          </a:bodyPr>
-          <a:lstStyle/>
-          <a:p>
-            <a:pPr algn="l">
-              <a:spcAft>
-                <a:spcPts val="0"/>
-              </a:spcAft>
-            </a:pPr>
-            <a:r>
-              <a:rPr sz="1100" b="0" i="0">
-                <a:solidFill>
-                  <a:srgbClr val="595959"/>
-                </a:solidFill>
-                <a:latin typeface="Calibri"/>
-              </a:rPr>
-              <a:t>The measurement</a:t>
-            </a:r>
-          </a:p>
-        </p:txBody>
-      </p:sp>
-      <p:sp>
-        <p:nvSpPr>
-          <p:cNvPr id="12" name="TextBox 11"/>
           <p:cNvSpPr txBox="1"/>
           <p:nvPr/>
         </p:nvSpPr>
@@ -7996,7 +7996,7 @@
                 </a:solidFill>
                 <a:latin typeface="Calibri"/>
               </a:rPr>
-              <a:t>Each person holds an opinion ±1, is pulled toward their neighbours with strength J, and is pushed by media with field h:</a:t>
+              <a:t>Each person holds an opinion ±1, is pulled toward neighbours by J, and pushed by media with field h = αX, where X is the measured observable:</a:t>
             </a:r>
           </a:p>
         </p:txBody>
@@ -8009,7 +8009,7 @@
         </p:nvSpPr>
         <p:spPr>
           <a:xfrm>
-            <a:off x="685800" y="2240280"/>
+            <a:off x="685800" y="2377440"/>
             <a:ext cx="10820095" cy="640080"/>
           </a:xfrm>
           <a:prstGeom prst="rect">
@@ -8035,7 +8035,7 @@
                 </a:solidFill>
                 <a:latin typeface="Calibri"/>
               </a:rPr>
-              <a:t>m  =  tanh( βJ m + h ),        h  =  α X</a:t>
+              <a:t>m  =  tanh( βJ m + h )</a:t>
             </a:r>
           </a:p>
         </p:txBody>
@@ -8048,8 +8048,8 @@
         </p:nvSpPr>
         <p:spPr>
           <a:xfrm>
-            <a:off x="685800" y="2971800"/>
-            <a:ext cx="10820095" cy="731520"/>
+            <a:off x="685800" y="3200400"/>
+            <a:ext cx="10820095" cy="640080"/>
           </a:xfrm>
           <a:prstGeom prst="rect">
             <a:avLst/>
@@ -8062,19 +8062,19 @@
           </a:bodyPr>
           <a:lstStyle/>
           <a:p>
-            <a:pPr algn="l">
-              <a:spcAft>
-                <a:spcPts val="0"/>
-              </a:spcAft>
-            </a:pPr>
-            <a:r>
-              <a:rPr sz="1900" b="0" i="0">
-                <a:solidFill>
-                  <a:srgbClr val="1A1A1A"/>
-                </a:solidFill>
-                <a:latin typeface="Calibri"/>
-              </a:rPr>
-              <a:t>where X is the measured observable and α the unknown coupling. Expanding artanh(m) ≈ m + m³/3:</a:t>
+            <a:pPr algn="ctr">
+              <a:spcAft>
+                <a:spcPts val="0"/>
+              </a:spcAft>
+            </a:pPr>
+            <a:r>
+              <a:rPr sz="2400" b="1" i="0">
+                <a:solidFill>
+                  <a:srgbClr val="1F4E79"/>
+                </a:solidFill>
+                <a:latin typeface="Calibri"/>
+              </a:rPr>
+              <a:t>F(m) = a m² + b m⁴ − h m,        a = (1 − βJ)/2,        b = 1/12</a:t>
             </a:r>
           </a:p>
         </p:txBody>
@@ -8087,8 +8087,8 @@
         </p:nvSpPr>
         <p:spPr>
           <a:xfrm>
-            <a:off x="685800" y="3657600"/>
-            <a:ext cx="10820095" cy="640080"/>
+            <a:off x="685800" y="4251960"/>
+            <a:ext cx="10820095" cy="1097280"/>
           </a:xfrm>
           <a:prstGeom prst="rect">
             <a:avLst/>
@@ -8101,19 +8101,19 @@
           </a:bodyPr>
           <a:lstStyle/>
           <a:p>
-            <a:pPr algn="ctr">
-              <a:spcAft>
-                <a:spcPts val="0"/>
-              </a:spcAft>
-            </a:pPr>
-            <a:r>
-              <a:rPr sz="2400" b="1" i="0">
-                <a:solidFill>
-                  <a:srgbClr val="1F4E79"/>
-                </a:solidFill>
-                <a:latin typeface="Calibri"/>
-              </a:rPr>
-              <a:t>F(m) = a m² + b m⁴ − h m,        a = (1 − βJ)/2,        b = 1/12</a:t>
+            <a:pPr algn="l">
+              <a:spcAft>
+                <a:spcPts val="0"/>
+              </a:spcAft>
+            </a:pPr>
+            <a:r>
+              <a:rPr sz="1800" b="0" i="0">
+                <a:solidFill>
+                  <a:srgbClr val="595959"/>
+                </a:solidFill>
+                <a:latin typeface="Calibri"/>
+              </a:rPr>
+              <a:t>Coefficients derived, not assumed; this corrects the proposal's a and b. The solver recovers the mean-field exponents.</a:t>
             </a:r>
           </a:p>
         </p:txBody>
@@ -8126,8 +8126,8 @@
         </p:nvSpPr>
         <p:spPr>
           <a:xfrm>
-            <a:off x="685800" y="4434840"/>
-            <a:ext cx="10820095" cy="1097280"/>
+            <a:off x="685800" y="6291072"/>
+            <a:ext cx="4572000" cy="320040"/>
           </a:xfrm>
           <a:prstGeom prst="rect">
             <a:avLst/>
@@ -8146,22 +8146,13 @@
               </a:spcAft>
             </a:pPr>
             <a:r>
-              <a:rPr sz="1700" b="1">
+              <a:rPr sz="1100" b="0" i="0">
                 <a:solidFill>
                   <a:srgbClr val="595959"/>
                 </a:solidFill>
                 <a:latin typeface="Calibri"/>
               </a:rPr>
-              <a:t>Coefficients derived from the self-consistency condition. </a:t>
-            </a:r>
-            <a:r>
-              <a:rPr sz="1700" b="0">
-                <a:solidFill>
-                  <a:srgbClr val="595959"/>
-                </a:solidFill>
-                <a:latin typeface="Calibri"/>
-              </a:rPr>
-              <a:t>The proposal carried a = 1 − βJ, b = (βJ)³/3, which do not follow from it. The solver reproduces the exact exponents 1/2, 1 and 3.</a:t>
+              <a:t>The physics</a:t>
             </a:r>
           </a:p>
         </p:txBody>
@@ -8169,45 +8160,6 @@
       <p:sp>
         <p:nvSpPr>
           <p:cNvPr id="9" name="TextBox 8"/>
-          <p:cNvSpPr txBox="1"/>
-          <p:nvPr/>
-        </p:nvSpPr>
-        <p:spPr>
-          <a:xfrm>
-            <a:off x="685800" y="6291072"/>
-            <a:ext cx="4572000" cy="320040"/>
-          </a:xfrm>
-          <a:prstGeom prst="rect">
-            <a:avLst/>
-          </a:prstGeom>
-          <a:noFill/>
-        </p:spPr>
-        <p:txBody>
-          <a:bodyPr wrap="square" anchor="t">
-            <a:spAutoFit/>
-          </a:bodyPr>
-          <a:lstStyle/>
-          <a:p>
-            <a:pPr algn="l">
-              <a:spcAft>
-                <a:spcPts val="0"/>
-              </a:spcAft>
-            </a:pPr>
-            <a:r>
-              <a:rPr sz="1100" b="0" i="0">
-                <a:solidFill>
-                  <a:srgbClr val="595959"/>
-                </a:solidFill>
-                <a:latin typeface="Calibri"/>
-              </a:rPr>
-              <a:t>The physics</a:t>
-            </a:r>
-          </a:p>
-        </p:txBody>
-      </p:sp>
-      <p:sp>
-        <p:nvSpPr>
-          <p:cNvPr id="10" name="TextBox 9"/>
           <p:cNvSpPr txBox="1"/>
           <p:nvPr/>
         </p:nvSpPr>
@@ -8334,7 +8286,7 @@
         <p:spPr>
           <a:xfrm>
             <a:off x="685800" y="1600200"/>
-            <a:ext cx="6035040" cy="3291840"/>
+            <a:ext cx="10820095" cy="3474720"/>
           </a:xfrm>
           <a:prstGeom prst="rect">
             <a:avLst/>
@@ -8349,7 +8301,7 @@
           <a:p>
             <a:pPr algn="l">
               <a:spcAft>
-                <a:spcPts val="1400"/>
+                <a:spcPts val="1600"/>
               </a:spcAft>
             </a:pPr>
             <a:r>
@@ -8359,7 +8311,7 @@
                 </a:solidFill>
                 <a:latin typeface="Calibri"/>
               </a:rPr>
-              <a:t>What was tried. </a:t>
+              <a:t>Tried. </a:t>
             </a:r>
             <a:r>
               <a:rPr sz="2000" b="0">
@@ -8368,13 +8320,13 @@
                 </a:solidFill>
                 <a:latin typeface="Calibri"/>
               </a:rPr>
-              <a:t>Regress the outcome on the measured index and read off α.</a:t>
+              <a:t>Fit the outcome to the measured index and read off α.</a:t>
             </a:r>
           </a:p>
           <a:p>
             <a:pPr>
               <a:spcAft>
-                <a:spcPts val="1400"/>
+                <a:spcPts val="1600"/>
               </a:spcAft>
             </a:pPr>
             <a:r>
@@ -8384,7 +8336,7 @@
                 </a:solidFill>
                 <a:latin typeface="Calibri"/>
               </a:rPr>
-              <a:t>What happened. </a:t>
+              <a:t>Result. </a:t>
             </a:r>
             <a:r>
               <a:rPr sz="2000" b="0">
@@ -8393,13 +8345,13 @@
                 </a:solidFill>
                 <a:latin typeface="Calibri"/>
               </a:rPr>
-              <a:t>The fit performs worse than the sample mean out of sample, and the estimate scales inversely with a coupling βJ that no measurement here fixes.</a:t>
+              <a:t>Out of sample the fit does worse than the average, and the estimate depends on βJ, which nothing here measures.</a:t>
             </a:r>
           </a:p>
           <a:p>
             <a:pPr>
               <a:spcAft>
-                <a:spcPts val="0"/>
+                <a:spcPts val="2000"/>
               </a:spcAft>
             </a:pPr>
             <a:r>
@@ -8409,7 +8361,23 @@
                 </a:solidFill>
                 <a:latin typeface="Calibri"/>
               </a:rPr>
-              <a:t>So no value of α-hat appears anywhere — not in a table, a caption, or “for illustration”.</a:t>
+              <a:t>So no value of α is quoted anywhere.</a:t>
+            </a:r>
+          </a:p>
+          <a:p>
+            <a:pPr>
+              <a:spcAft>
+                <a:spcPts val="0"/>
+              </a:spcAft>
+            </a:pPr>
+            <a:r>
+              <a:rPr sz="1800" b="0" i="0">
+                <a:solidFill>
+                  <a:srgbClr val="595959"/>
+                </a:solidFill>
+                <a:latin typeface="Calibri"/>
+              </a:rPr>
+              <a:t>What replaces it needs no fit at all: the bound on the next slide.</a:t>
             </a:r>
           </a:p>
         </p:txBody>
@@ -8422,8 +8390,8 @@
         </p:nvSpPr>
         <p:spPr>
           <a:xfrm>
-            <a:off x="7360920" y="1691640"/>
-            <a:ext cx="4160520" cy="2743200"/>
+            <a:off x="685800" y="6291072"/>
+            <a:ext cx="4572000" cy="320040"/>
           </a:xfrm>
           <a:prstGeom prst="rect">
             <a:avLst/>
@@ -8438,33 +8406,17 @@
           <a:p>
             <a:pPr algn="l">
               <a:spcAft>
-                <a:spcPts val="1400"/>
-              </a:spcAft>
-            </a:pPr>
-            <a:r>
-              <a:rPr sz="1700" b="0" i="0">
+                <a:spcPts val="0"/>
+              </a:spcAft>
+            </a:pPr>
+            <a:r>
+              <a:rPr sz="1100" b="0" i="0">
                 <a:solidFill>
                   <a:srgbClr val="595959"/>
                 </a:solidFill>
                 <a:latin typeface="Calibri"/>
               </a:rPr>
-              <a:t>Reporting an unidentified coupling as though it were measured would be the failure here. Declining to quote it is not.</a:t>
-            </a:r>
-          </a:p>
-          <a:p>
-            <a:pPr>
-              <a:spcAft>
-                <a:spcPts val="0"/>
-              </a:spcAft>
-            </a:pPr>
-            <a:r>
-              <a:rPr sz="1700" b="0" i="0">
-                <a:solidFill>
-                  <a:srgbClr val="595959"/>
-                </a:solidFill>
-                <a:latin typeface="Calibri"/>
-              </a:rPr>
-              <a:t>What replaces it is a statement that does not need the fit at all.</a:t>
+              <a:t>The physics</a:t>
             </a:r>
           </a:p>
         </p:txBody>
@@ -8472,45 +8424,6 @@
       <p:sp>
         <p:nvSpPr>
           <p:cNvPr id="6" name="TextBox 5"/>
-          <p:cNvSpPr txBox="1"/>
-          <p:nvPr/>
-        </p:nvSpPr>
-        <p:spPr>
-          <a:xfrm>
-            <a:off x="685800" y="6291072"/>
-            <a:ext cx="4572000" cy="320040"/>
-          </a:xfrm>
-          <a:prstGeom prst="rect">
-            <a:avLst/>
-          </a:prstGeom>
-          <a:noFill/>
-        </p:spPr>
-        <p:txBody>
-          <a:bodyPr wrap="square" anchor="t">
-            <a:spAutoFit/>
-          </a:bodyPr>
-          <a:lstStyle/>
-          <a:p>
-            <a:pPr algn="l">
-              <a:spcAft>
-                <a:spcPts val="0"/>
-              </a:spcAft>
-            </a:pPr>
-            <a:r>
-              <a:rPr sz="1100" b="0" i="0">
-                <a:solidFill>
-                  <a:srgbClr val="595959"/>
-                </a:solidFill>
-                <a:latin typeface="Calibri"/>
-              </a:rPr>
-              <a:t>The physics</a:t>
-            </a:r>
-          </a:p>
-        </p:txBody>
-      </p:sp>
-      <p:sp>
-        <p:nvSpPr>
-          <p:cNvPr id="7" name="TextBox 6"/>
           <p:cNvSpPr txBox="1"/>
           <p:nvPr/>
         </p:nvSpPr>
@@ -8644,8 +8557,8 @@
         </p:blipFill>
         <p:spPr>
           <a:xfrm>
-            <a:off x="685800" y="1463040"/>
-            <a:ext cx="4618191" cy="3154680"/>
+            <a:off x="685800" y="1325880"/>
+            <a:ext cx="5889867" cy="4023360"/>
           </a:xfrm>
           <a:prstGeom prst="rect">
             <a:avLst/>
@@ -8660,8 +8573,8 @@
         </p:nvSpPr>
         <p:spPr>
           <a:xfrm>
-            <a:off x="6720840" y="1737360"/>
-            <a:ext cx="4800600" cy="822960"/>
+            <a:off x="6949440" y="1737360"/>
+            <a:ext cx="4572000" cy="822960"/>
           </a:xfrm>
           <a:prstGeom prst="rect">
             <a:avLst/>
@@ -8717,8 +8630,8 @@
         </p:nvSpPr>
         <p:spPr>
           <a:xfrm>
-            <a:off x="6720840" y="2697480"/>
-            <a:ext cx="4800600" cy="1920240"/>
+            <a:off x="6949440" y="2743200"/>
+            <a:ext cx="4572000" cy="2377440"/>
           </a:xfrm>
           <a:prstGeom prst="rect">
             <a:avLst/>
@@ -8733,7 +8646,7 @@
           <a:p>
             <a:pPr algn="l">
               <a:spcAft>
-                <a:spcPts val="0"/>
+                <a:spcPts val="1400"/>
               </a:spcAft>
             </a:pPr>
             <a:r>
@@ -8743,7 +8656,32 @@
                 </a:solidFill>
                 <a:latin typeface="Calibri"/>
               </a:rPr>
-              <a:t>Rather than fitting α and hoping it clears zero, this states what α would have to be for the mechanism to work at all — for any candidate observable, before a corpus exists.</a:t>
+              <a:t>What α would have to be for media to tip opinion, for any observable, before any data. Within the mean-field model.</a:t>
+            </a:r>
+          </a:p>
+          <a:p>
+            <a:pPr>
+              <a:spcAft>
+                <a:spcPts val="0"/>
+              </a:spcAft>
+            </a:pPr>
+            <a:r>
+              <a:rPr sz="1800" b="0">
+                <a:solidFill>
+                  <a:srgbClr val="1A1A1A"/>
+                </a:solidFill>
+                <a:latin typeface="Calibri"/>
+              </a:rPr>
+              <a:t>Measured ΔX = 0.1241 gives </a:t>
+            </a:r>
+            <a:r>
+              <a:rPr sz="1800" b="1">
+                <a:solidFill>
+                  <a:srgbClr val="C0392B"/>
+                </a:solidFill>
+                <a:latin typeface="Calibri"/>
+              </a:rPr>
+              <a:t>α ≥ 4.29 at βJ = 2.</a:t>
             </a:r>
           </a:p>
         </p:txBody>
@@ -8756,8 +8694,8 @@
         </p:nvSpPr>
         <p:spPr>
           <a:xfrm>
-            <a:off x="685800" y="4892040"/>
-            <a:ext cx="10820095" cy="640080"/>
+            <a:off x="685800" y="6291072"/>
+            <a:ext cx="4572000" cy="320040"/>
           </a:xfrm>
           <a:prstGeom prst="rect">
             <a:avLst/>
@@ -8770,28 +8708,19 @@
           </a:bodyPr>
           <a:lstStyle/>
           <a:p>
-            <a:pPr algn="ctr">
-              <a:spcAft>
-                <a:spcPts val="0"/>
-              </a:spcAft>
-            </a:pPr>
-            <a:r>
-              <a:rPr sz="1800" b="0">
-                <a:solidFill>
-                  <a:srgbClr val="1A1A1A"/>
-                </a:solidFill>
-                <a:latin typeface="Calibri"/>
-              </a:rPr>
-              <a:t>Measured spread ΔX = 0.1241  ⇒  α ≥ 0.169 at βJ = 1.10,   1.655 at 1.50,   </a:t>
-            </a:r>
-            <a:r>
-              <a:rPr sz="1800" b="1">
-                <a:solidFill>
-                  <a:srgbClr val="1F4E79"/>
-                </a:solidFill>
-                <a:latin typeface="Calibri"/>
-              </a:rPr>
-              <a:t>4.294 at 2.00</a:t>
+            <a:pPr algn="l">
+              <a:spcAft>
+                <a:spcPts val="0"/>
+              </a:spcAft>
+            </a:pPr>
+            <a:r>
+              <a:rPr sz="1100" b="0" i="0">
+                <a:solidFill>
+                  <a:srgbClr val="595959"/>
+                </a:solidFill>
+                <a:latin typeface="Calibri"/>
+              </a:rPr>
+              <a:t>The physics</a:t>
             </a:r>
           </a:p>
         </p:txBody>
@@ -8799,45 +8728,6 @@
       <p:sp>
         <p:nvSpPr>
           <p:cNvPr id="8" name="TextBox 7"/>
-          <p:cNvSpPr txBox="1"/>
-          <p:nvPr/>
-        </p:nvSpPr>
-        <p:spPr>
-          <a:xfrm>
-            <a:off x="685800" y="6291072"/>
-            <a:ext cx="4572000" cy="320040"/>
-          </a:xfrm>
-          <a:prstGeom prst="rect">
-            <a:avLst/>
-          </a:prstGeom>
-          <a:noFill/>
-        </p:spPr>
-        <p:txBody>
-          <a:bodyPr wrap="square" anchor="t">
-            <a:spAutoFit/>
-          </a:bodyPr>
-          <a:lstStyle/>
-          <a:p>
-            <a:pPr algn="l">
-              <a:spcAft>
-                <a:spcPts val="0"/>
-              </a:spcAft>
-            </a:pPr>
-            <a:r>
-              <a:rPr sz="1100" b="0" i="0">
-                <a:solidFill>
-                  <a:srgbClr val="595959"/>
-                </a:solidFill>
-                <a:latin typeface="Calibri"/>
-              </a:rPr>
-              <a:t>The physics</a:t>
-            </a:r>
-          </a:p>
-        </p:txBody>
-      </p:sp>
-      <p:sp>
-        <p:nvSpPr>
-          <p:cNvPr id="9" name="TextBox 8"/>
           <p:cNvSpPr txBox="1"/>
           <p:nvPr/>
         </p:nvSpPr>
@@ -9063,7 +8953,7 @@
                 </a:solidFill>
                 <a:latin typeface="Calibri"/>
               </a:rPr>
-              <a:t>Whether the encoder tracks real cortex is measurable, and one pass remains</a:t>
+              <a:t>Against real brains the encoder is weakly positive, not anti-correlated</a:t>
             </a:r>
           </a:p>
         </p:txBody>
@@ -9102,7 +8992,7 @@
                 </a:solidFill>
                 <a:latin typeface="Calibri"/>
               </a:rPr>
-              <a:t>A commercial lab reports the released checkpoint, in the averaged configuration this project runs, is anti-correlated with real cortex. Four subjects, one stimulus, not independently replicated.</a:t>
+              <a:t>A company audit says the checkpoint this project runs is anti-correlated with real cortex. Tested here on public fMRI:</a:t>
             </a:r>
           </a:p>
         </p:txBody>
@@ -9115,8 +9005,8 @@
         </p:nvSpPr>
         <p:spPr>
           <a:xfrm>
-            <a:off x="1600200" y="2514600"/>
-            <a:ext cx="4114800" cy="1417320"/>
+            <a:off x="822960" y="2514600"/>
+            <a:ext cx="3246120" cy="1508760"/>
           </a:xfrm>
           <a:prstGeom prst="roundRect">
             <a:avLst>
@@ -9179,7 +9069,7 @@
                 </a:solidFill>
                 <a:latin typeface="Calibri"/>
               </a:rPr>
-              <a:t>measured noise ceiling</a:t>
+              <a:t>noise ceiling</a:t>
             </a:r>
           </a:p>
           <a:p>
@@ -9195,7 +9085,7 @@
                 </a:solidFill>
                 <a:latin typeface="Calibri"/>
               </a:rPr>
-              <a:t>CI [0.1484, 0.1551], 4 subjects, 1000 parcels</a:t>
+              <a:t>full episode, 4 subjects</a:t>
             </a:r>
           </a:p>
         </p:txBody>
@@ -9208,8 +9098,101 @@
         </p:nvSpPr>
         <p:spPr>
           <a:xfrm>
-            <a:off x="6446520" y="2514600"/>
-            <a:ext cx="4114800" cy="1417320"/>
+            <a:off x="4480560" y="2514600"/>
+            <a:ext cx="3246120" cy="1508760"/>
+          </a:xfrm>
+          <a:prstGeom prst="roundRect">
+            <a:avLst>
+              <a:gd name="adj" fmla="val 6000"/>
+            </a:avLst>
+          </a:prstGeom>
+          <a:solidFill>
+            <a:srgbClr val="FFFFFF"/>
+          </a:solidFill>
+          <a:ln w="15875">
+            <a:solidFill>
+              <a:srgbClr val="1F4E79"/>
+            </a:solidFill>
+          </a:ln>
+          <a:effectLst/>
+        </p:spPr>
+        <p:style>
+          <a:lnRef idx="1">
+            <a:schemeClr val="accent1"/>
+          </a:lnRef>
+          <a:fillRef idx="3">
+            <a:schemeClr val="accent1"/>
+          </a:fillRef>
+          <a:effectRef idx="2">
+            <a:schemeClr val="accent1"/>
+          </a:effectRef>
+          <a:fontRef idx="minor">
+            <a:schemeClr val="lt1"/>
+          </a:fontRef>
+        </p:style>
+        <p:txBody>
+          <a:bodyPr rtlCol="0" anchor="ctr" wrap="square"/>
+          <a:lstStyle/>
+          <a:p>
+            <a:pPr algn="ctr">
+              <a:spcAft>
+                <a:spcPts val="200"/>
+              </a:spcAft>
+            </a:pPr>
+            <a:r>
+              <a:rPr sz="3000" b="1" i="0">
+                <a:solidFill>
+                  <a:srgbClr val="1F4E79"/>
+                </a:solidFill>
+                <a:latin typeface="Calibri"/>
+              </a:rPr>
+              <a:t>+0.028</a:t>
+            </a:r>
+          </a:p>
+          <a:p>
+            <a:pPr algn="ctr">
+              <a:spcAft>
+                <a:spcPts val="200"/>
+              </a:spcAft>
+            </a:pPr>
+            <a:r>
+              <a:rPr sz="1600" b="0" i="0">
+                <a:solidFill>
+                  <a:srgbClr val="1A1A1A"/>
+                </a:solidFill>
+                <a:latin typeface="Calibri"/>
+              </a:rPr>
+              <a:t>encoder vs brains</a:t>
+            </a:r>
+          </a:p>
+          <a:p>
+            <a:pPr algn="ctr">
+              <a:spcAft>
+                <a:spcPts val="0"/>
+              </a:spcAft>
+            </a:pPr>
+            <a:r>
+              <a:rPr sz="1200" b="0" i="0">
+                <a:solidFill>
+                  <a:srgbClr val="595959"/>
+                </a:solidFill>
+                <a:latin typeface="Calibri"/>
+              </a:rPr>
+              <a:t>ceiling 0.096 on the same 80 scans, p = 0.048</a:t>
+            </a:r>
+          </a:p>
+        </p:txBody>
+      </p:sp>
+      <p:sp>
+        <p:nvSpPr>
+          <p:cNvPr id="7" name="Rounded Rectangle 6"/>
+          <p:cNvSpPr/>
+          <p:nvPr/>
+        </p:nvSpPr>
+        <p:spPr>
+          <a:xfrm>
+            <a:off x="8138160" y="2514600"/>
+            <a:ext cx="3246120" cy="1508760"/>
           </a:xfrm>
           <a:prstGeom prst="roundRect">
             <a:avLst>
@@ -9256,7 +9239,7 @@
                 </a:solidFill>
                 <a:latin typeface="Calibri"/>
               </a:rPr>
-              <a:t>0.2247</a:t>
+              <a:t>3 bugs</a:t>
             </a:r>
           </a:p>
           <a:p>
@@ -9272,7 +9255,7 @@
                 </a:solidFill>
                 <a:latin typeface="Calibri"/>
               </a:rPr>
-              <a:t>withdrawn</a:t>
+              <a:t>silent, found, fixed</a:t>
             </a:r>
           </a:p>
           <a:p>
@@ -9288,20 +9271,20 @@
                 </a:solidFill>
                 <a:latin typeface="Calibri"/>
               </a:rPr>
-              <a:t>an episode picked by position, and a guard that could not fire</a:t>
-            </a:r>
-          </a:p>
-        </p:txBody>
-      </p:sp>
-      <p:sp>
-        <p:nvSpPr>
-          <p:cNvPr id="7" name="TextBox 6"/>
+              <a:t>wrong episode, flipped array, two clocks</a:t>
+            </a:r>
+          </a:p>
+        </p:txBody>
+      </p:sp>
+      <p:sp>
+        <p:nvSpPr>
+          <p:cNvPr id="8" name="TextBox 7"/>
           <p:cNvSpPr txBox="1"/>
           <p:nvPr/>
         </p:nvSpPr>
         <p:spPr>
           <a:xfrm>
-            <a:off x="685800" y="4160520"/>
+            <a:off x="685800" y="4343400"/>
             <a:ext cx="10820095" cy="914400"/>
           </a:xfrm>
           <a:prstGeom prst="rect">
@@ -9327,14 +9310,14 @@
                 </a:solidFill>
                 <a:latin typeface="Calibri"/>
               </a:rPr>
-              <a:t>Replaying the old code path reproduces the wrong number exactly, which proved the cause. Both defects were silent: nothing crashed.</a:t>
-            </a:r>
-          </a:p>
-        </p:txBody>
-      </p:sp>
-      <p:sp>
-        <p:nvSpPr>
-          <p:cNvPr id="8" name="TextBox 7"/>
+              <a:t>Positive, weak, and not yet decisive on two minutes of film.</a:t>
+            </a:r>
+          </a:p>
+        </p:txBody>
+      </p:sp>
+      <p:sp>
+        <p:nvSpPr>
+          <p:cNvPr id="9" name="TextBox 8"/>
           <p:cNvSpPr txBox="1"/>
           <p:nvPr/>
         </p:nvSpPr>
@@ -9366,14 +9349,14 @@
                 </a:solidFill>
                 <a:latin typeface="Calibri"/>
               </a:rPr>
-              <a:t>Schaefer et al. (2018); Algonauts 2025 (CC0); audit self-published, Sapient (2026).</a:t>
-            </a:r>
-          </a:p>
-        </p:txBody>
-      </p:sp>
-      <p:sp>
-        <p:nvSpPr>
-          <p:cNvPr id="9" name="TextBox 8"/>
+              <a:t>Algonauts 2025; Schaefer et al. (2018); audit: The Sapient Company (2026).</a:t>
+            </a:r>
+          </a:p>
+        </p:txBody>
+      </p:sp>
+      <p:sp>
+        <p:nvSpPr>
+          <p:cNvPr id="10" name="TextBox 9"/>
           <p:cNvSpPr txBox="1"/>
           <p:nvPr/>
         </p:nvSpPr>
@@ -9412,7 +9395,7 @@
       </p:sp>
       <p:sp>
         <p:nvSpPr>
-          <p:cNvPr id="10" name="TextBox 9"/>
+          <p:cNvPr id="11" name="TextBox 10"/>
           <p:cNvSpPr txBox="1"/>
           <p:nvPr/>
         </p:nvSpPr>
@@ -9675,7 +9658,7 @@
                 </a:solidFill>
                 <a:latin typeface="Calibri"/>
               </a:rPr>
-              <a:t>•  A measured noise ceiling for the checkpoint on public data.</a:t>
+              <a:t>•  A noise ceiling on public fMRI, and a first check of the encoder against it.</a:t>
             </a:r>
           </a:p>
         </p:txBody>
@@ -10165,7 +10148,7 @@
                 </a:solidFill>
                 <a:latin typeface="Calibri"/>
               </a:rPr>
-              <a:t>15 pp</a:t>
+              <a:t>16 pp</a:t>
             </a:r>
           </a:p>
           <a:p>
@@ -10236,7 +10219,7 @@
                 </a:solidFill>
                 <a:latin typeface="Calibri"/>
               </a:rPr>
-              <a:t>6 pp</a:t>
+              <a:t>8 pp</a:t>
             </a:r>
           </a:p>
           <a:p>
@@ -10268,7 +10251,7 @@
                 </a:solidFill>
                 <a:latin typeface="Calibri"/>
               </a:rPr>
-              <a:t>The measured ceiling and the replication. Imaging Neuroscience. One computation on its final run.</a:t>
+              <a:t>The noise ceiling and a check of the encoder against real brains. Imaging Neuroscience.</a:t>
             </a:r>
           </a:p>
         </p:txBody>
@@ -10660,7 +10643,7 @@
                 </a:solidFill>
                 <a:latin typeface="Calibri"/>
               </a:rPr>
-              <a:t>The instrument's own validity is now a measurable question. </a:t>
+              <a:t>The encoder is weakly positive against real brains, not anti-correlated. </a:t>
             </a:r>
             <a:r>
               <a:rPr sz="1800" b="0">
@@ -10669,7 +10652,7 @@
                 </a:solidFill>
                 <a:latin typeface="Calibri"/>
               </a:rPr>
-              <a:t>The noise ceiling is 0.1517; one prediction pass remains.</a:t>
+              <a:t>r = +0.028 against a ceiling of 0.096 on the same scans; not yet decisive.</a:t>
             </a:r>
           </a:p>
         </p:txBody>
@@ -10900,8 +10883,8 @@
         </p:nvSpPr>
         <p:spPr>
           <a:xfrm>
-            <a:off x="685800" y="1417320"/>
-            <a:ext cx="10820095" cy="4572000"/>
+            <a:off x="685800" y="1325880"/>
+            <a:ext cx="10820095" cy="4754880"/>
           </a:xfrm>
           <a:prstGeom prst="rect">
             <a:avLst/>
@@ -10916,11 +10899,11 @@
           <a:p>
             <a:pPr algn="l">
               <a:spcAft>
-                <a:spcPts val="1000"/>
-              </a:spcAft>
-            </a:pPr>
-            <a:r>
-              <a:rPr sz="1400" b="0" i="0">
+                <a:spcPts val="600"/>
+              </a:spcAft>
+            </a:pPr>
+            <a:r>
+              <a:rPr sz="1300" b="0" i="0">
                 <a:solidFill>
                   <a:srgbClr val="1A1A1A"/>
                 </a:solidFill>
@@ -10932,11 +10915,11 @@
           <a:p>
             <a:pPr>
               <a:spcAft>
-                <a:spcPts val="1000"/>
-              </a:spcAft>
-            </a:pPr>
-            <a:r>
-              <a:rPr sz="1400" b="0" i="0">
+                <a:spcPts val="600"/>
+              </a:spcAft>
+            </a:pPr>
+            <a:r>
+              <a:rPr sz="1300" b="0" i="0">
                 <a:solidFill>
                   <a:srgbClr val="1A1A1A"/>
                 </a:solidFill>
@@ -10948,43 +10931,75 @@
           <a:p>
             <a:pPr>
               <a:spcAft>
-                <a:spcPts val="1000"/>
-              </a:spcAft>
-            </a:pPr>
-            <a:r>
-              <a:rPr sz="1400" b="0" i="0">
+                <a:spcPts val="600"/>
+              </a:spcAft>
+            </a:pPr>
+            <a:r>
+              <a:rPr sz="1300" b="0" i="0">
                 <a:solidFill>
                   <a:srgbClr val="1A1A1A"/>
                 </a:solidFill>
                 <a:latin typeface="Calibri"/>
               </a:rPr>
+              <a:t>Gifford, A. T. et al. (2025). The Algonauts Project 2025 Challenge. arXiv:2501.00504.</a:t>
+            </a:r>
+          </a:p>
+          <a:p>
+            <a:pPr>
+              <a:spcAft>
+                <a:spcPts val="600"/>
+              </a:spcAft>
+            </a:pPr>
+            <a:r>
+              <a:rPr sz="1300" b="0" i="0">
+                <a:solidFill>
+                  <a:srgbClr val="1A1A1A"/>
+                </a:solidFill>
+                <a:latin typeface="Calibri"/>
+              </a:rPr>
               <a:t>Glasser, M. F. et al. (2016). A multi-modal parcellation of human cerebral cortex. Nature 536, 171–178.</a:t>
             </a:r>
           </a:p>
           <a:p>
             <a:pPr>
               <a:spcAft>
-                <a:spcPts val="1000"/>
-              </a:spcAft>
-            </a:pPr>
-            <a:r>
-              <a:rPr sz="1400" b="0" i="0">
+                <a:spcPts val="600"/>
+              </a:spcAft>
+            </a:pPr>
+            <a:r>
+              <a:rPr sz="1300" b="0" i="0">
                 <a:solidFill>
                   <a:srgbClr val="1A1A1A"/>
                 </a:solidFill>
                 <a:latin typeface="Calibri"/>
               </a:rPr>
+              <a:t>Hutto, C. J., Gilbert, E. (2014). VADER: a parsimonious rule-based model for sentiment analysis of social media text. ICWSM.</a:t>
+            </a:r>
+          </a:p>
+          <a:p>
+            <a:pPr>
+              <a:spcAft>
+                <a:spcPts val="600"/>
+              </a:spcAft>
+            </a:pPr>
+            <a:r>
+              <a:rPr sz="1300" b="0" i="0">
+                <a:solidFill>
+                  <a:srgbClr val="1A1A1A"/>
+                </a:solidFill>
+                <a:latin typeface="Calibri"/>
+              </a:rPr>
               <a:t>Kiesel, J. et al. (2019). SemEval-2019 Task 4: hyperpartisan news detection. SemEval.</a:t>
             </a:r>
           </a:p>
           <a:p>
             <a:pPr>
               <a:spcAft>
-                <a:spcPts val="1000"/>
-              </a:spcAft>
-            </a:pPr>
-            <a:r>
-              <a:rPr sz="1400" b="0" i="0">
+                <a:spcPts val="600"/>
+              </a:spcAft>
+            </a:pPr>
+            <a:r>
+              <a:rPr sz="1300" b="0" i="0">
                 <a:solidFill>
                   <a:srgbClr val="1A1A1A"/>
                 </a:solidFill>
@@ -10996,49 +11011,49 @@
           <a:p>
             <a:pPr>
               <a:spcAft>
-                <a:spcPts val="1000"/>
-              </a:spcAft>
-            </a:pPr>
-            <a:r>
-              <a:rPr sz="1400" b="0" i="0">
+                <a:spcPts val="600"/>
+              </a:spcAft>
+            </a:pPr>
+            <a:r>
+              <a:rPr sz="1300" b="0" i="0">
                 <a:solidFill>
                   <a:srgbClr val="1A1A1A"/>
                 </a:solidFill>
                 <a:latin typeface="Calibri"/>
               </a:rPr>
-              <a:t>Potthast, M. et al. (2018). The Webis clickbait challenge 2017. ECIR.</a:t>
+              <a:t>Potthast, M. et al. (2018). Crowdsourcing a large corpus of clickbait on Twitter. COLING, 1498–1507.</a:t>
             </a:r>
           </a:p>
           <a:p>
             <a:pPr>
               <a:spcAft>
-                <a:spcPts val="1000"/>
-              </a:spcAft>
-            </a:pPr>
-            <a:r>
-              <a:rPr sz="1400" b="0" i="0">
+                <a:spcPts val="600"/>
+              </a:spcAft>
+            </a:pPr>
+            <a:r>
+              <a:rPr sz="1300" b="0" i="0">
                 <a:solidFill>
                   <a:srgbClr val="1A1A1A"/>
                 </a:solidFill>
                 <a:latin typeface="Calibri"/>
               </a:rPr>
+              <a:t>The Sapient Company (2026). The Faceless Brain. Self-published technical report.</a:t>
+            </a:r>
+          </a:p>
+          <a:p>
+            <a:pPr>
+              <a:spcAft>
+                <a:spcPts val="600"/>
+              </a:spcAft>
+            </a:pPr>
+            <a:r>
+              <a:rPr sz="1300" b="0" i="0">
+                <a:solidFill>
+                  <a:srgbClr val="1A1A1A"/>
+                </a:solidFill>
+                <a:latin typeface="Calibri"/>
+              </a:rPr>
               <a:t>Schaefer, A. et al. (2018). Local-global parcellation of the human cerebral cortex. Cereb. Cortex 28, 3095–3114.</a:t>
-            </a:r>
-          </a:p>
-          <a:p>
-            <a:pPr>
-              <a:spcAft>
-                <a:spcPts val="1000"/>
-              </a:spcAft>
-            </a:pPr>
-            <a:r>
-              <a:rPr sz="1400" b="0" i="0">
-                <a:solidFill>
-                  <a:srgbClr val="1A1A1A"/>
-                </a:solidFill>
-                <a:latin typeface="Calibri"/>
-              </a:rPr>
-              <a:t>The Algonauts Project 2025 Challenge. arXiv:2501.00504.</a:t>
             </a:r>
           </a:p>
         </p:txBody>
